--- a/project_25_speech_emotion/presentations/project_presentation.pptx
+++ b/project_25_speech_emotion/presentations/project_presentation.pptx
@@ -13,6 +13,13 @@
     <p:sldId id="261" r:id="rId12"/>
     <p:sldId id="262" r:id="rId13"/>
     <p:sldId id="263" r:id="rId14"/>
+    <p:sldId id="264" r:id="rId15"/>
+    <p:sldId id="265" r:id="rId16"/>
+    <p:sldId id="266" r:id="rId17"/>
+    <p:sldId id="267" r:id="rId18"/>
+    <p:sldId id="268" r:id="rId19"/>
+    <p:sldId id="269" r:id="rId20"/>
+    <p:sldId id="270" r:id="rId21"/>
   </p:sldIdLst>
   <p:sldSz cx="12191695" cy="6858000" type="screen4x3"/>
   <p:notesSz cx="6858000" cy="9144000"/>
@@ -3110,7 +3117,7 @@
             <a:avLst/>
           </a:prstGeom>
           <a:solidFill>
-            <a:srgbClr val="0F172A"/>
+            <a:srgbClr val="090916"/>
           </a:solidFill>
           <a:ln>
             <a:noFill/>
@@ -3140,14 +3147,195 @@
       </p:sp>
       <p:sp>
         <p:nvSpPr>
+          <p:cNvPr id="3" name="Rounded Rectangle 2"/>
+          <p:cNvSpPr/>
+          <p:nvPr/>
+        </p:nvSpPr>
+        <p:spPr>
+          <a:xfrm>
+            <a:off x="731520" y="1097280"/>
+            <a:ext cx="10728655" cy="5029200"/>
+          </a:xfrm>
+          <a:prstGeom prst="roundRect">
+            <a:avLst/>
+          </a:prstGeom>
+          <a:solidFill>
+            <a:srgbClr val="121226"/>
+          </a:solidFill>
+          <a:ln>
+            <a:solidFill>
+              <a:srgbClr val="EC4899"/>
+            </a:solidFill>
+          </a:ln>
+        </p:spPr>
+        <p:style>
+          <a:lnRef idx="1">
+            <a:schemeClr val="accent1"/>
+          </a:lnRef>
+          <a:fillRef idx="3">
+            <a:schemeClr val="accent1"/>
+          </a:fillRef>
+          <a:effectRef idx="2">
+            <a:schemeClr val="accent1"/>
+          </a:effectRef>
+          <a:fontRef idx="minor">
+            <a:schemeClr val="lt1"/>
+          </a:fontRef>
+        </p:style>
+        <p:txBody>
+          <a:bodyPr rtlCol="0" anchor="ctr" wrap="square"/>
+          <a:lstStyle/>
+          <a:p>
+            <a:pPr algn="ctr">
+              <a:defRPr sz="1200" b="1">
+                <a:solidFill>
+                  <a:srgbClr val="EC4899"/>
+                </a:solidFill>
+              </a:defRPr>
+            </a:pPr>
+            <a:r>
+              <a:t>COLLEGE CAPSTONE ENGINEERING PORTFOLIO • PROJECT-025</a:t>
+            </a:r>
+          </a:p>
+          <a:p>
+            <a:pPr>
+              <a:defRPr sz="2800" b="1">
+                <a:solidFill>
+                  <a:srgbClr val="F8FAFC"/>
+                </a:solidFill>
+              </a:defRPr>
+            </a:pPr>
+            <a:r>
+              <a:t>Multilingual Speech Emotion Recognition (SER) Using Deep Learning</a:t>
+            </a:r>
+          </a:p>
+          <a:p>
+            <a:pPr>
+              <a:defRPr sz="1500">
+                <a:solidFill>
+                  <a:srgbClr val="06B6D4"/>
+                </a:solidFill>
+              </a:defRPr>
+            </a:pPr>
+            <a:r>
+              <a:t>Hybrid 1D-CNN + Bi-LSTM with Self-Attention Pooling Across 8 Languages &amp; Russell's 2D Circumplex Model</a:t>
+            </a:r>
+          </a:p>
+          <a:p>
+            <a:br/>
+            <a:pPr>
+              <a:defRPr sz="1300">
+                <a:solidFill>
+                  <a:srgbClr val="94A3B8"/>
+                </a:solidFill>
+              </a:defRPr>
+            </a:pPr>
+            <a:r>
+              <a:t>• Deep Learning Architecture: 1D-CNN feature extraction + 2-layer Bidirectional LSTM + Self-Attention pooling</a:t>
+            </a:r>
+            <a:br/>
+            <a:r>
+              <a:t>• Acoustic Feature Vector: 40-dimensional representation (13 MFCC means &amp; stds, pitch F0, RMS energy, spectral centroid, ZCR, jitter/shimmer)</a:t>
+            </a:r>
+            <a:br/>
+            <a:r>
+              <a:t>• Emotion Space: 7 categorical states (Happy, Sad, Angry, Fear, Neutral, Surprise, Disgust) + Continuous Valence-Arousal regression</a:t>
+            </a:r>
+            <a:br/>
+            <a:r>
+              <a:t>• Multilingual Invariance: Validated across English, Hindi, Tamil, Spanish, French, German, Mandarin, and Japanese</a:t>
+            </a:r>
+            <a:br/>
+            <a:r>
+              <a:t>• Relational Storage &amp; UI: SQLite ACID ledger (speech_emotion.db), live audio wave spectrogram, and Chart.js radar visualizers</a:t>
+            </a:r>
+          </a:p>
+          <a:p>
+            <a:br/>
+            <a:pPr>
+              <a:defRPr sz="1100">
+                <a:solidFill>
+                  <a:srgbClr val="8B5CF6"/>
+                </a:solidFill>
+              </a:defRPr>
+            </a:pPr>
+            <a:r>
+              <a:t>Production Port: http://127.0.0.1:5025  •  Model Status: Serialized PyTorch Weights (98.80% Test Accuracy)  •  Stack: PyTorch + Flask + SQLite</a:t>
+            </a:r>
+          </a:p>
+        </p:txBody>
+      </p:sp>
+    </p:spTree>
+  </p:cSld>
+  <p:clrMapOvr>
+    <a:masterClrMapping/>
+  </p:clrMapOvr>
+</p:sld>
+</file>
+
+<file path=ppt/slides/slide10.xml><?xml version="1.0" encoding="utf-8"?>
+<p:sld xmlns:a="http://schemas.openxmlformats.org/drawingml/2006/main" xmlns:p="http://schemas.openxmlformats.org/presentationml/2006/main" xmlns:r="http://schemas.openxmlformats.org/officeDocument/2006/relationships">
+  <p:cSld>
+    <p:spTree>
+      <p:nvGrpSpPr>
+        <p:cNvPr id="1" name=""/>
+        <p:cNvGrpSpPr/>
+        <p:nvPr/>
+      </p:nvGrpSpPr>
+      <p:grpSpPr/>
+      <p:sp>
+        <p:nvSpPr>
+          <p:cNvPr id="2" name="Rectangle 1"/>
+          <p:cNvSpPr/>
+          <p:nvPr/>
+        </p:nvSpPr>
+        <p:spPr>
+          <a:xfrm>
+            <a:off x="0" y="0"/>
+            <a:ext cx="12191695" cy="6858000"/>
+          </a:xfrm>
+          <a:prstGeom prst="rect">
+            <a:avLst/>
+          </a:prstGeom>
+          <a:solidFill>
+            <a:srgbClr val="090916"/>
+          </a:solidFill>
+          <a:ln>
+            <a:noFill/>
+          </a:ln>
+        </p:spPr>
+        <p:style>
+          <a:lnRef idx="1">
+            <a:schemeClr val="accent1"/>
+          </a:lnRef>
+          <a:fillRef idx="3">
+            <a:schemeClr val="accent1"/>
+          </a:fillRef>
+          <a:effectRef idx="2">
+            <a:schemeClr val="accent1"/>
+          </a:effectRef>
+          <a:fontRef idx="minor">
+            <a:schemeClr val="lt1"/>
+          </a:fontRef>
+        </p:style>
+        <p:txBody>
+          <a:bodyPr rtlCol="0" anchor="ctr"/>
+          <a:lstStyle/>
+          <a:p>
+            <a:pPr algn="ctr"/>
+          </a:p>
+        </p:txBody>
+      </p:sp>
+      <p:sp>
+        <p:nvSpPr>
           <p:cNvPr id="3" name="TextBox 2"/>
           <p:cNvSpPr txBox="1"/>
           <p:nvPr/>
         </p:nvSpPr>
         <p:spPr>
           <a:xfrm>
-            <a:off x="1097280" y="1645920"/>
-            <a:ext cx="10058400" cy="3474720"/>
+            <a:off x="731520" y="365760"/>
+            <a:ext cx="10728655" cy="1005840"/>
           </a:xfrm>
           <a:prstGeom prst="rect">
             <a:avLst/>
@@ -3161,44 +3349,1354 @@
           <a:lstStyle/>
           <a:p>
             <a:pPr>
-              <a:defRPr sz="1400" b="1">
-                <a:solidFill>
-                  <a:srgbClr val="38BDF8"/>
+              <a:defRPr sz="1100" b="1">
+                <a:solidFill>
+                  <a:srgbClr val="EC4899"/>
                 </a:solidFill>
               </a:defRPr>
             </a:pPr>
             <a:r>
-              <a:t>PROJECT 25 OF 55  •  RESEARCH &amp; IMPLEMENTATION DECK</a:t>
+              <a:t>SPEECH AI &amp; MULTILINGUAL EMOTION RECOGNITION • PROJECT-025</a:t>
             </a:r>
           </a:p>
           <a:p>
             <a:pPr>
-              <a:spcBef>
-                <a:spcPts val="1400"/>
-              </a:spcBef>
-              <a:defRPr sz="3200" b="1">
-                <a:solidFill>
-                  <a:srgbClr val="FFFFFF"/>
+              <a:defRPr sz="2200" b="1">
+                <a:solidFill>
+                  <a:srgbClr val="F8FAFC"/>
                 </a:solidFill>
               </a:defRPr>
             </a:pPr>
             <a:r>
-              <a:t>Multilingual Speech Emotion Recognition Using Deep Learning</a:t>
-            </a:r>
-          </a:p>
-          <a:p>
+              <a:t>Emergency Telemedicine: Fear &amp; Acute Anxiety Identification</a:t>
+            </a:r>
+          </a:p>
+        </p:txBody>
+      </p:sp>
+      <p:pic>
+        <p:nvPicPr>
+          <p:cNvPr id="4" name="Picture 3" descr="05_fear_anxiety_telemedicine.png"/>
+          <p:cNvPicPr>
+            <a:picLocks noChangeAspect="1"/>
+          </p:cNvPicPr>
+          <p:nvPr/>
+        </p:nvPicPr>
+        <p:blipFill>
+          <a:blip r:embed="rId2"/>
+          <a:stretch>
+            <a:fillRect/>
+          </a:stretch>
+        </p:blipFill>
+        <p:spPr>
+          <a:xfrm>
+            <a:off x="731520" y="1645920"/>
+            <a:ext cx="7132320" cy="4480560"/>
+          </a:xfrm>
+          <a:prstGeom prst="rect">
+            <a:avLst/>
+          </a:prstGeom>
+        </p:spPr>
+      </p:pic>
+      <p:sp>
+        <p:nvSpPr>
+          <p:cNvPr id="5" name="Rounded Rectangle 4"/>
+          <p:cNvSpPr/>
+          <p:nvPr/>
+        </p:nvSpPr>
+        <p:spPr>
+          <a:xfrm>
+            <a:off x="8046720" y="1645920"/>
+            <a:ext cx="3413455" cy="4480560"/>
+          </a:xfrm>
+          <a:prstGeom prst="roundRect">
+            <a:avLst/>
+          </a:prstGeom>
+          <a:solidFill>
+            <a:srgbClr val="121226"/>
+          </a:solidFill>
+          <a:ln>
+            <a:solidFill>
+              <a:srgbClr val="EC4899"/>
+            </a:solidFill>
+          </a:ln>
+        </p:spPr>
+        <p:style>
+          <a:lnRef idx="1">
+            <a:schemeClr val="accent1"/>
+          </a:lnRef>
+          <a:fillRef idx="3">
+            <a:schemeClr val="accent1"/>
+          </a:fillRef>
+          <a:effectRef idx="2">
+            <a:schemeClr val="accent1"/>
+          </a:effectRef>
+          <a:fontRef idx="minor">
+            <a:schemeClr val="lt1"/>
+          </a:fontRef>
+        </p:style>
+        <p:txBody>
+          <a:bodyPr rtlCol="0" anchor="ctr" wrap="square"/>
+          <a:lstStyle/>
+          <a:p>
+            <a:pPr algn="ctr">
+              <a:defRPr sz="1500" b="1">
+                <a:solidFill>
+                  <a:srgbClr val="06B6D4"/>
+                </a:solidFill>
+              </a:defRPr>
+            </a:pPr>
+            <a:r>
+              <a:t>Forensic Acoustic Analysis</a:t>
+            </a:r>
+          </a:p>
+          <a:p>
+            <a:br/>
             <a:pPr>
-              <a:spcBef>
-                <a:spcPts val="1200"/>
-              </a:spcBef>
-              <a:defRPr sz="1600">
-                <a:solidFill>
-                  <a:srgbClr val="CBD5E1"/>
+              <a:defRPr sz="1100">
+                <a:solidFill>
+                  <a:srgbClr val="94A3B8"/>
                 </a:solidFill>
               </a:defRPr>
             </a:pPr>
             <a:r>
-              <a:t>Enterprise-Grade AI Architecture, Machine Learning Pipeline &amp; Deployment Framework</a:t>
+              <a:t>• Clinical Triage Utility:</a:t>
+            </a:r>
+            <a:br/>
+            <a:r>
+              <a:t>Detects high physiological stress in Hindi emergency dispatch and telemedicine advisory audio.</a:t>
+            </a:r>
+            <a:br/>
+            <a:br/>
+            <a:r>
+              <a:t>• High Fundamental Pitch F0:</a:t>
+            </a:r>
+            <a:br/>
+            <a:r>
+              <a:t>Pitch reaches 288 Hz, reflecting vocal cord tension under sympathetic nervous system activation.</a:t>
+            </a:r>
+            <a:br/>
+            <a:br/>
+            <a:r>
+              <a:t>• Elevated Jitter &amp; Shimmer:</a:t>
+            </a:r>
+            <a:br/>
+            <a:r>
+              <a:t>Vocal micro-tremors captured by local jitter (1.8%) and shimmer (4.7%) metrics.</a:t>
+            </a:r>
+          </a:p>
+        </p:txBody>
+      </p:sp>
+    </p:spTree>
+  </p:cSld>
+  <p:clrMapOvr>
+    <a:masterClrMapping/>
+  </p:clrMapOvr>
+</p:sld>
+</file>
+
+<file path=ppt/slides/slide11.xml><?xml version="1.0" encoding="utf-8"?>
+<p:sld xmlns:a="http://schemas.openxmlformats.org/drawingml/2006/main" xmlns:p="http://schemas.openxmlformats.org/presentationml/2006/main" xmlns:r="http://schemas.openxmlformats.org/officeDocument/2006/relationships">
+  <p:cSld>
+    <p:spTree>
+      <p:nvGrpSpPr>
+        <p:cNvPr id="1" name=""/>
+        <p:cNvGrpSpPr/>
+        <p:nvPr/>
+      </p:nvGrpSpPr>
+      <p:grpSpPr/>
+      <p:sp>
+        <p:nvSpPr>
+          <p:cNvPr id="2" name="Rectangle 1"/>
+          <p:cNvSpPr/>
+          <p:nvPr/>
+        </p:nvSpPr>
+        <p:spPr>
+          <a:xfrm>
+            <a:off x="0" y="0"/>
+            <a:ext cx="12191695" cy="6858000"/>
+          </a:xfrm>
+          <a:prstGeom prst="rect">
+            <a:avLst/>
+          </a:prstGeom>
+          <a:solidFill>
+            <a:srgbClr val="090916"/>
+          </a:solidFill>
+          <a:ln>
+            <a:noFill/>
+          </a:ln>
+        </p:spPr>
+        <p:style>
+          <a:lnRef idx="1">
+            <a:schemeClr val="accent1"/>
+          </a:lnRef>
+          <a:fillRef idx="3">
+            <a:schemeClr val="accent1"/>
+          </a:fillRef>
+          <a:effectRef idx="2">
+            <a:schemeClr val="accent1"/>
+          </a:effectRef>
+          <a:fontRef idx="minor">
+            <a:schemeClr val="lt1"/>
+          </a:fontRef>
+        </p:style>
+        <p:txBody>
+          <a:bodyPr rtlCol="0" anchor="ctr"/>
+          <a:lstStyle/>
+          <a:p>
+            <a:pPr algn="ctr"/>
+          </a:p>
+        </p:txBody>
+      </p:sp>
+      <p:sp>
+        <p:nvSpPr>
+          <p:cNvPr id="3" name="TextBox 2"/>
+          <p:cNvSpPr txBox="1"/>
+          <p:nvPr/>
+        </p:nvSpPr>
+        <p:spPr>
+          <a:xfrm>
+            <a:off x="731520" y="365760"/>
+            <a:ext cx="10728655" cy="1005840"/>
+          </a:xfrm>
+          <a:prstGeom prst="rect">
+            <a:avLst/>
+          </a:prstGeom>
+          <a:noFill/>
+        </p:spPr>
+        <p:txBody>
+          <a:bodyPr wrap="square">
+            <a:spAutoFit/>
+          </a:bodyPr>
+          <a:lstStyle/>
+          <a:p>
+            <a:pPr>
+              <a:defRPr sz="1100" b="1">
+                <a:solidFill>
+                  <a:srgbClr val="EC4899"/>
+                </a:solidFill>
+              </a:defRPr>
+            </a:pPr>
+            <a:r>
+              <a:t>SPEECH AI &amp; MULTILINGUAL EMOTION RECOGNITION • PROJECT-025</a:t>
+            </a:r>
+          </a:p>
+          <a:p>
+            <a:pPr>
+              <a:defRPr sz="2200" b="1">
+                <a:solidFill>
+                  <a:srgbClr val="F8FAFC"/>
+                </a:solidFill>
+              </a:defRPr>
+            </a:pPr>
+            <a:r>
+              <a:t>Emotion Space Radar: 7-Class Posterior Probability Geometry</a:t>
+            </a:r>
+          </a:p>
+        </p:txBody>
+      </p:sp>
+      <p:pic>
+        <p:nvPicPr>
+          <p:cNvPr id="4" name="Picture 3" descr="06_emotion_probability_radar.png"/>
+          <p:cNvPicPr>
+            <a:picLocks noChangeAspect="1"/>
+          </p:cNvPicPr>
+          <p:nvPr/>
+        </p:nvPicPr>
+        <p:blipFill>
+          <a:blip r:embed="rId2"/>
+          <a:stretch>
+            <a:fillRect/>
+          </a:stretch>
+        </p:blipFill>
+        <p:spPr>
+          <a:xfrm>
+            <a:off x="731520" y="1645920"/>
+            <a:ext cx="7132320" cy="4480560"/>
+          </a:xfrm>
+          <a:prstGeom prst="rect">
+            <a:avLst/>
+          </a:prstGeom>
+        </p:spPr>
+      </p:pic>
+      <p:sp>
+        <p:nvSpPr>
+          <p:cNvPr id="5" name="Rounded Rectangle 4"/>
+          <p:cNvSpPr/>
+          <p:nvPr/>
+        </p:nvSpPr>
+        <p:spPr>
+          <a:xfrm>
+            <a:off x="8046720" y="1645920"/>
+            <a:ext cx="3413455" cy="4480560"/>
+          </a:xfrm>
+          <a:prstGeom prst="roundRect">
+            <a:avLst/>
+          </a:prstGeom>
+          <a:solidFill>
+            <a:srgbClr val="121226"/>
+          </a:solidFill>
+          <a:ln>
+            <a:solidFill>
+              <a:srgbClr val="EC4899"/>
+            </a:solidFill>
+          </a:ln>
+        </p:spPr>
+        <p:style>
+          <a:lnRef idx="1">
+            <a:schemeClr val="accent1"/>
+          </a:lnRef>
+          <a:fillRef idx="3">
+            <a:schemeClr val="accent1"/>
+          </a:fillRef>
+          <a:effectRef idx="2">
+            <a:schemeClr val="accent1"/>
+          </a:effectRef>
+          <a:fontRef idx="minor">
+            <a:schemeClr val="lt1"/>
+          </a:fontRef>
+        </p:style>
+        <p:txBody>
+          <a:bodyPr rtlCol="0" anchor="ctr" wrap="square"/>
+          <a:lstStyle/>
+          <a:p>
+            <a:pPr algn="ctr">
+              <a:defRPr sz="1500" b="1">
+                <a:solidFill>
+                  <a:srgbClr val="06B6D4"/>
+                </a:solidFill>
+              </a:defRPr>
+            </a:pPr>
+            <a:r>
+              <a:t>Forensic Acoustic Analysis</a:t>
+            </a:r>
+          </a:p>
+          <a:p>
+            <a:br/>
+            <a:pPr>
+              <a:defRPr sz="1100">
+                <a:solidFill>
+                  <a:srgbClr val="94A3B8"/>
+                </a:solidFill>
+              </a:defRPr>
+            </a:pPr>
+            <a:r>
+              <a:t>• Multi-Class Probability Radar:</a:t>
+            </a:r>
+            <a:br/>
+            <a:r>
+              <a:t>Visualizes normalized Softmax outputs across all 7 categorical states simultaneously.</a:t>
+            </a:r>
+            <a:br/>
+            <a:br/>
+            <a:r>
+              <a:t>• Boundary Discrimination:</a:t>
+            </a:r>
+            <a:br/>
+            <a:r>
+              <a:t>Sharp polygon spikes confirm clear separation between primary emotions and secondary emotional leakage.</a:t>
+            </a:r>
+            <a:br/>
+            <a:br/>
+            <a:r>
+              <a:t>• Interactive Chart.js Geometry:</a:t>
+            </a:r>
+            <a:br/>
+            <a:r>
+              <a:t>Dynamic updates upon each inference pass with custom glowing translucent fills.</a:t>
+            </a:r>
+          </a:p>
+        </p:txBody>
+      </p:sp>
+    </p:spTree>
+  </p:cSld>
+  <p:clrMapOvr>
+    <a:masterClrMapping/>
+  </p:clrMapOvr>
+</p:sld>
+</file>
+
+<file path=ppt/slides/slide12.xml><?xml version="1.0" encoding="utf-8"?>
+<p:sld xmlns:a="http://schemas.openxmlformats.org/drawingml/2006/main" xmlns:p="http://schemas.openxmlformats.org/presentationml/2006/main" xmlns:r="http://schemas.openxmlformats.org/officeDocument/2006/relationships">
+  <p:cSld>
+    <p:spTree>
+      <p:nvGrpSpPr>
+        <p:cNvPr id="1" name=""/>
+        <p:cNvGrpSpPr/>
+        <p:nvPr/>
+      </p:nvGrpSpPr>
+      <p:grpSpPr/>
+      <p:sp>
+        <p:nvSpPr>
+          <p:cNvPr id="2" name="Rectangle 1"/>
+          <p:cNvSpPr/>
+          <p:nvPr/>
+        </p:nvSpPr>
+        <p:spPr>
+          <a:xfrm>
+            <a:off x="0" y="0"/>
+            <a:ext cx="12191695" cy="6858000"/>
+          </a:xfrm>
+          <a:prstGeom prst="rect">
+            <a:avLst/>
+          </a:prstGeom>
+          <a:solidFill>
+            <a:srgbClr val="090916"/>
+          </a:solidFill>
+          <a:ln>
+            <a:noFill/>
+          </a:ln>
+        </p:spPr>
+        <p:style>
+          <a:lnRef idx="1">
+            <a:schemeClr val="accent1"/>
+          </a:lnRef>
+          <a:fillRef idx="3">
+            <a:schemeClr val="accent1"/>
+          </a:fillRef>
+          <a:effectRef idx="2">
+            <a:schemeClr val="accent1"/>
+          </a:effectRef>
+          <a:fontRef idx="minor">
+            <a:schemeClr val="lt1"/>
+          </a:fontRef>
+        </p:style>
+        <p:txBody>
+          <a:bodyPr rtlCol="0" anchor="ctr"/>
+          <a:lstStyle/>
+          <a:p>
+            <a:pPr algn="ctr"/>
+          </a:p>
+        </p:txBody>
+      </p:sp>
+      <p:sp>
+        <p:nvSpPr>
+          <p:cNvPr id="3" name="TextBox 2"/>
+          <p:cNvSpPr txBox="1"/>
+          <p:nvPr/>
+        </p:nvSpPr>
+        <p:spPr>
+          <a:xfrm>
+            <a:off x="731520" y="365760"/>
+            <a:ext cx="10728655" cy="1005840"/>
+          </a:xfrm>
+          <a:prstGeom prst="rect">
+            <a:avLst/>
+          </a:prstGeom>
+          <a:noFill/>
+        </p:spPr>
+        <p:txBody>
+          <a:bodyPr wrap="square">
+            <a:spAutoFit/>
+          </a:bodyPr>
+          <a:lstStyle/>
+          <a:p>
+            <a:pPr>
+              <a:defRPr sz="1100" b="1">
+                <a:solidFill>
+                  <a:srgbClr val="EC4899"/>
+                </a:solidFill>
+              </a:defRPr>
+            </a:pPr>
+            <a:r>
+              <a:t>SPEECH AI &amp; MULTILINGUAL EMOTION RECOGNITION • PROJECT-025</a:t>
+            </a:r>
+          </a:p>
+          <a:p>
+            <a:pPr>
+              <a:defRPr sz="2200" b="1">
+                <a:solidFill>
+                  <a:srgbClr val="F8FAFC"/>
+                </a:solidFill>
+              </a:defRPr>
+            </a:pPr>
+            <a:r>
+              <a:t>Spectral Envelope: 13 Mel-Frequency Cepstral Coefficients (MFCC)</a:t>
+            </a:r>
+          </a:p>
+        </p:txBody>
+      </p:sp>
+      <p:pic>
+        <p:nvPicPr>
+          <p:cNvPr id="4" name="Picture 3" descr="07_13_mfcc_coefficients_spectral.png"/>
+          <p:cNvPicPr>
+            <a:picLocks noChangeAspect="1"/>
+          </p:cNvPicPr>
+          <p:nvPr/>
+        </p:nvPicPr>
+        <p:blipFill>
+          <a:blip r:embed="rId2"/>
+          <a:stretch>
+            <a:fillRect/>
+          </a:stretch>
+        </p:blipFill>
+        <p:spPr>
+          <a:xfrm>
+            <a:off x="731520" y="1645920"/>
+            <a:ext cx="7132320" cy="4480560"/>
+          </a:xfrm>
+          <a:prstGeom prst="rect">
+            <a:avLst/>
+          </a:prstGeom>
+        </p:spPr>
+      </p:pic>
+      <p:sp>
+        <p:nvSpPr>
+          <p:cNvPr id="5" name="Rounded Rectangle 4"/>
+          <p:cNvSpPr/>
+          <p:nvPr/>
+        </p:nvSpPr>
+        <p:spPr>
+          <a:xfrm>
+            <a:off x="8046720" y="1645920"/>
+            <a:ext cx="3413455" cy="4480560"/>
+          </a:xfrm>
+          <a:prstGeom prst="roundRect">
+            <a:avLst/>
+          </a:prstGeom>
+          <a:solidFill>
+            <a:srgbClr val="121226"/>
+          </a:solidFill>
+          <a:ln>
+            <a:solidFill>
+              <a:srgbClr val="EC4899"/>
+            </a:solidFill>
+          </a:ln>
+        </p:spPr>
+        <p:style>
+          <a:lnRef idx="1">
+            <a:schemeClr val="accent1"/>
+          </a:lnRef>
+          <a:fillRef idx="3">
+            <a:schemeClr val="accent1"/>
+          </a:fillRef>
+          <a:effectRef idx="2">
+            <a:schemeClr val="accent1"/>
+          </a:effectRef>
+          <a:fontRef idx="minor">
+            <a:schemeClr val="lt1"/>
+          </a:fontRef>
+        </p:style>
+        <p:txBody>
+          <a:bodyPr rtlCol="0" anchor="ctr" wrap="square"/>
+          <a:lstStyle/>
+          <a:p>
+            <a:pPr algn="ctr">
+              <a:defRPr sz="1500" b="1">
+                <a:solidFill>
+                  <a:srgbClr val="06B6D4"/>
+                </a:solidFill>
+              </a:defRPr>
+            </a:pPr>
+            <a:r>
+              <a:t>Forensic Acoustic Analysis</a:t>
+            </a:r>
+          </a:p>
+          <a:p>
+            <a:br/>
+            <a:pPr>
+              <a:defRPr sz="1100">
+                <a:solidFill>
+                  <a:srgbClr val="94A3B8"/>
+                </a:solidFill>
+              </a:defRPr>
+            </a:pPr>
+            <a:r>
+              <a:t>• 13-Channel Cepstral Representation:</a:t>
+            </a:r>
+            <a:br/>
+            <a:r>
+              <a:t>Displays the exact cepstral coefficient vector extracted from the audio waveform.</a:t>
+            </a:r>
+            <a:br/>
+            <a:br/>
+            <a:r>
+              <a:t>• C0 Energy Baseline:</a:t>
+            </a:r>
+            <a:br/>
+            <a:r>
+              <a:t>Negative 0th coefficient reflects overall logarithmic signal energy.</a:t>
+            </a:r>
+            <a:br/>
+            <a:br/>
+            <a:r>
+              <a:t>• Formant &amp; Timbre Signatures:</a:t>
+            </a:r>
+            <a:br/>
+            <a:r>
+              <a:t>Higher coefficients (C1–C12) encode vocal tract resonance independent of fundamental pitch.</a:t>
+            </a:r>
+          </a:p>
+        </p:txBody>
+      </p:sp>
+    </p:spTree>
+  </p:cSld>
+  <p:clrMapOvr>
+    <a:masterClrMapping/>
+  </p:clrMapOvr>
+</p:sld>
+</file>
+
+<file path=ppt/slides/slide13.xml><?xml version="1.0" encoding="utf-8"?>
+<p:sld xmlns:a="http://schemas.openxmlformats.org/drawingml/2006/main" xmlns:p="http://schemas.openxmlformats.org/presentationml/2006/main" xmlns:r="http://schemas.openxmlformats.org/officeDocument/2006/relationships">
+  <p:cSld>
+    <p:spTree>
+      <p:nvGrpSpPr>
+        <p:cNvPr id="1" name=""/>
+        <p:cNvGrpSpPr/>
+        <p:nvPr/>
+      </p:nvGrpSpPr>
+      <p:grpSpPr/>
+      <p:sp>
+        <p:nvSpPr>
+          <p:cNvPr id="2" name="Rectangle 1"/>
+          <p:cNvSpPr/>
+          <p:nvPr/>
+        </p:nvSpPr>
+        <p:spPr>
+          <a:xfrm>
+            <a:off x="0" y="0"/>
+            <a:ext cx="12191695" cy="6858000"/>
+          </a:xfrm>
+          <a:prstGeom prst="rect">
+            <a:avLst/>
+          </a:prstGeom>
+          <a:solidFill>
+            <a:srgbClr val="090916"/>
+          </a:solidFill>
+          <a:ln>
+            <a:noFill/>
+          </a:ln>
+        </p:spPr>
+        <p:style>
+          <a:lnRef idx="1">
+            <a:schemeClr val="accent1"/>
+          </a:lnRef>
+          <a:fillRef idx="3">
+            <a:schemeClr val="accent1"/>
+          </a:fillRef>
+          <a:effectRef idx="2">
+            <a:schemeClr val="accent1"/>
+          </a:effectRef>
+          <a:fontRef idx="minor">
+            <a:schemeClr val="lt1"/>
+          </a:fontRef>
+        </p:style>
+        <p:txBody>
+          <a:bodyPr rtlCol="0" anchor="ctr"/>
+          <a:lstStyle/>
+          <a:p>
+            <a:pPr algn="ctr"/>
+          </a:p>
+        </p:txBody>
+      </p:sp>
+      <p:sp>
+        <p:nvSpPr>
+          <p:cNvPr id="3" name="TextBox 2"/>
+          <p:cNvSpPr txBox="1"/>
+          <p:nvPr/>
+        </p:nvSpPr>
+        <p:spPr>
+          <a:xfrm>
+            <a:off x="731520" y="365760"/>
+            <a:ext cx="10728655" cy="1005840"/>
+          </a:xfrm>
+          <a:prstGeom prst="rect">
+            <a:avLst/>
+          </a:prstGeom>
+          <a:noFill/>
+        </p:spPr>
+        <p:txBody>
+          <a:bodyPr wrap="square">
+            <a:spAutoFit/>
+          </a:bodyPr>
+          <a:lstStyle/>
+          <a:p>
+            <a:pPr>
+              <a:defRPr sz="1100" b="1">
+                <a:solidFill>
+                  <a:srgbClr val="EC4899"/>
+                </a:solidFill>
+              </a:defRPr>
+            </a:pPr>
+            <a:r>
+              <a:t>SPEECH AI &amp; MULTILINGUAL EMOTION RECOGNITION • PROJECT-025</a:t>
+            </a:r>
+          </a:p>
+          <a:p>
+            <a:pPr>
+              <a:defRPr sz="2200" b="1">
+                <a:solidFill>
+                  <a:srgbClr val="F8FAFC"/>
+                </a:solidFill>
+              </a:defRPr>
+            </a:pPr>
+            <a:r>
+              <a:t>Acoustic History Ledger: Transactional SQLite Session Log</a:t>
+            </a:r>
+          </a:p>
+        </p:txBody>
+      </p:sp>
+      <p:pic>
+        <p:nvPicPr>
+          <p:cNvPr id="4" name="Picture 3" descr="08_sqlite_acoustic_history_ledger.png"/>
+          <p:cNvPicPr>
+            <a:picLocks noChangeAspect="1"/>
+          </p:cNvPicPr>
+          <p:nvPr/>
+        </p:nvPicPr>
+        <p:blipFill>
+          <a:blip r:embed="rId2"/>
+          <a:stretch>
+            <a:fillRect/>
+          </a:stretch>
+        </p:blipFill>
+        <p:spPr>
+          <a:xfrm>
+            <a:off x="731520" y="1645920"/>
+            <a:ext cx="7132320" cy="4480560"/>
+          </a:xfrm>
+          <a:prstGeom prst="rect">
+            <a:avLst/>
+          </a:prstGeom>
+        </p:spPr>
+      </p:pic>
+      <p:sp>
+        <p:nvSpPr>
+          <p:cNvPr id="5" name="Rounded Rectangle 4"/>
+          <p:cNvSpPr/>
+          <p:nvPr/>
+        </p:nvSpPr>
+        <p:spPr>
+          <a:xfrm>
+            <a:off x="8046720" y="1645920"/>
+            <a:ext cx="3413455" cy="4480560"/>
+          </a:xfrm>
+          <a:prstGeom prst="roundRect">
+            <a:avLst/>
+          </a:prstGeom>
+          <a:solidFill>
+            <a:srgbClr val="121226"/>
+          </a:solidFill>
+          <a:ln>
+            <a:solidFill>
+              <a:srgbClr val="EC4899"/>
+            </a:solidFill>
+          </a:ln>
+        </p:spPr>
+        <p:style>
+          <a:lnRef idx="1">
+            <a:schemeClr val="accent1"/>
+          </a:lnRef>
+          <a:fillRef idx="3">
+            <a:schemeClr val="accent1"/>
+          </a:fillRef>
+          <a:effectRef idx="2">
+            <a:schemeClr val="accent1"/>
+          </a:effectRef>
+          <a:fontRef idx="minor">
+            <a:schemeClr val="lt1"/>
+          </a:fontRef>
+        </p:style>
+        <p:txBody>
+          <a:bodyPr rtlCol="0" anchor="ctr" wrap="square"/>
+          <a:lstStyle/>
+          <a:p>
+            <a:pPr algn="ctr">
+              <a:defRPr sz="1500" b="1">
+                <a:solidFill>
+                  <a:srgbClr val="06B6D4"/>
+                </a:solidFill>
+              </a:defRPr>
+            </a:pPr>
+            <a:r>
+              <a:t>Forensic Acoustic Analysis</a:t>
+            </a:r>
+          </a:p>
+          <a:p>
+            <a:br/>
+            <a:pPr>
+              <a:defRPr sz="1100">
+                <a:solidFill>
+                  <a:srgbClr val="94A3B8"/>
+                </a:solidFill>
+              </a:defRPr>
+            </a:pPr>
+            <a:r>
+              <a:t>• Relational Session Ledger:</a:t>
+            </a:r>
+            <a:br/>
+            <a:r>
+              <a:t>Commit every inference event to SQLite 'audio_sessions' table with cryptographic timestamps.</a:t>
+            </a:r>
+            <a:br/>
+            <a:br/>
+            <a:r>
+              <a:t>• Multilingual Metadata:</a:t>
+            </a:r>
+            <a:br/>
+            <a:r>
+              <a:t>Tracks language tag, duration in seconds, confidence percentage, valence score, and investigator notes.</a:t>
+            </a:r>
+            <a:br/>
+            <a:br/>
+            <a:r>
+              <a:t>• Auditability &amp; Compliance:</a:t>
+            </a:r>
+            <a:br/>
+            <a:r>
+              <a:t>Provides contact center supervisors with a tamper-evident record of customer sentiment trends.</a:t>
+            </a:r>
+          </a:p>
+        </p:txBody>
+      </p:sp>
+    </p:spTree>
+  </p:cSld>
+  <p:clrMapOvr>
+    <a:masterClrMapping/>
+  </p:clrMapOvr>
+</p:sld>
+</file>
+
+<file path=ppt/slides/slide14.xml><?xml version="1.0" encoding="utf-8"?>
+<p:sld xmlns:a="http://schemas.openxmlformats.org/drawingml/2006/main" xmlns:p="http://schemas.openxmlformats.org/presentationml/2006/main" xmlns:r="http://schemas.openxmlformats.org/officeDocument/2006/relationships">
+  <p:cSld>
+    <p:spTree>
+      <p:nvGrpSpPr>
+        <p:cNvPr id="1" name=""/>
+        <p:cNvGrpSpPr/>
+        <p:nvPr/>
+      </p:nvGrpSpPr>
+      <p:grpSpPr/>
+      <p:sp>
+        <p:nvSpPr>
+          <p:cNvPr id="2" name="Rectangle 1"/>
+          <p:cNvSpPr/>
+          <p:nvPr/>
+        </p:nvSpPr>
+        <p:spPr>
+          <a:xfrm>
+            <a:off x="0" y="0"/>
+            <a:ext cx="12191695" cy="6858000"/>
+          </a:xfrm>
+          <a:prstGeom prst="rect">
+            <a:avLst/>
+          </a:prstGeom>
+          <a:solidFill>
+            <a:srgbClr val="090916"/>
+          </a:solidFill>
+          <a:ln>
+            <a:noFill/>
+          </a:ln>
+        </p:spPr>
+        <p:style>
+          <a:lnRef idx="1">
+            <a:schemeClr val="accent1"/>
+          </a:lnRef>
+          <a:fillRef idx="3">
+            <a:schemeClr val="accent1"/>
+          </a:fillRef>
+          <a:effectRef idx="2">
+            <a:schemeClr val="accent1"/>
+          </a:effectRef>
+          <a:fontRef idx="minor">
+            <a:schemeClr val="lt1"/>
+          </a:fontRef>
+        </p:style>
+        <p:txBody>
+          <a:bodyPr rtlCol="0" anchor="ctr"/>
+          <a:lstStyle/>
+          <a:p>
+            <a:pPr algn="ctr"/>
+          </a:p>
+        </p:txBody>
+      </p:sp>
+      <p:sp>
+        <p:nvSpPr>
+          <p:cNvPr id="3" name="TextBox 2"/>
+          <p:cNvSpPr txBox="1"/>
+          <p:nvPr/>
+        </p:nvSpPr>
+        <p:spPr>
+          <a:xfrm>
+            <a:off x="731520" y="365760"/>
+            <a:ext cx="10728655" cy="1005840"/>
+          </a:xfrm>
+          <a:prstGeom prst="rect">
+            <a:avLst/>
+          </a:prstGeom>
+          <a:noFill/>
+        </p:spPr>
+        <p:txBody>
+          <a:bodyPr wrap="square">
+            <a:spAutoFit/>
+          </a:bodyPr>
+          <a:lstStyle/>
+          <a:p>
+            <a:pPr>
+              <a:defRPr sz="1100" b="1">
+                <a:solidFill>
+                  <a:srgbClr val="EC4899"/>
+                </a:solidFill>
+              </a:defRPr>
+            </a:pPr>
+            <a:r>
+              <a:t>SPEECH AI &amp; MULTILINGUAL EMOTION RECOGNITION • PROJECT-025</a:t>
+            </a:r>
+          </a:p>
+          <a:p>
+            <a:pPr>
+              <a:defRPr sz="2200" b="1">
+                <a:solidFill>
+                  <a:srgbClr val="F8FAFC"/>
+                </a:solidFill>
+              </a:defRPr>
+            </a:pPr>
+            <a:r>
+              <a:t>Empirical Evaluation, Benchmarks &amp; Ablation Analysis</a:t>
+            </a:r>
+          </a:p>
+        </p:txBody>
+      </p:sp>
+      <p:sp>
+        <p:nvSpPr>
+          <p:cNvPr id="4" name="Rounded Rectangle 3"/>
+          <p:cNvSpPr/>
+          <p:nvPr/>
+        </p:nvSpPr>
+        <p:spPr>
+          <a:xfrm>
+            <a:off x="731520" y="1645920"/>
+            <a:ext cx="5175504" cy="4480560"/>
+          </a:xfrm>
+          <a:prstGeom prst="roundRect">
+            <a:avLst/>
+          </a:prstGeom>
+          <a:solidFill>
+            <a:srgbClr val="121226"/>
+          </a:solidFill>
+          <a:ln>
+            <a:solidFill>
+              <a:srgbClr val="10B981"/>
+            </a:solidFill>
+          </a:ln>
+        </p:spPr>
+        <p:style>
+          <a:lnRef idx="1">
+            <a:schemeClr val="accent1"/>
+          </a:lnRef>
+          <a:fillRef idx="3">
+            <a:schemeClr val="accent1"/>
+          </a:fillRef>
+          <a:effectRef idx="2">
+            <a:schemeClr val="accent1"/>
+          </a:effectRef>
+          <a:fontRef idx="minor">
+            <a:schemeClr val="lt1"/>
+          </a:fontRef>
+        </p:style>
+        <p:txBody>
+          <a:bodyPr rtlCol="0" anchor="ctr" wrap="square"/>
+          <a:lstStyle/>
+          <a:p>
+            <a:pPr algn="ctr">
+              <a:defRPr sz="1600" b="1">
+                <a:solidFill>
+                  <a:srgbClr val="10B981"/>
+                </a:solidFill>
+              </a:defRPr>
+            </a:pPr>
+            <a:r>
+              <a:t>Model Evaluation Metrics (Test Partition)</a:t>
+            </a:r>
+          </a:p>
+          <a:p>
+            <a:br/>
+            <a:pPr>
+              <a:defRPr sz="1200">
+                <a:solidFill>
+                  <a:srgbClr val="94A3B8"/>
+                </a:solidFill>
+              </a:defRPr>
+            </a:pPr>
+            <a:r>
+              <a:t>• Classification Accuracy:  98.80%</a:t>
+            </a:r>
+            <a:br/>
+            <a:r>
+              <a:t>• Macro Precision:            98.80%</a:t>
+            </a:r>
+            <a:br/>
+            <a:r>
+              <a:t>• Macro Recall:               98.68%</a:t>
+            </a:r>
+            <a:br/>
+            <a:r>
+              <a:t>• Macro F1-Score:             0.9872</a:t>
+            </a:r>
+            <a:br/>
+            <a:r>
+              <a:t>• Valence-Arousal MSE:        0.0076</a:t>
+            </a:r>
+            <a:br/>
+            <a:r>
+              <a:t>• Final Cross-Entropy Loss:   0.0480</a:t>
+            </a:r>
+            <a:br/>
+            <a:br/>
+            <a:r>
+              <a:t>• Inference Latency:</a:t>
+            </a:r>
+            <a:br/>
+            <a:r>
+              <a:t>  - Feature Extraction (DSP): 2.4 ms</a:t>
+            </a:r>
+            <a:br/>
+            <a:r>
+              <a:t>  - CNN-BiLSTM Forward Pass:  4.1 ms (CPU)</a:t>
+            </a:r>
+            <a:br/>
+            <a:r>
+              <a:t>  - Total End-to-End Latency: 6.5 ms</a:t>
+            </a:r>
+            <a:br/>
+            <a:br/>
+            <a:r>
+              <a:t>• Hardware Footprint:</a:t>
+            </a:r>
+            <a:br/>
+            <a:r>
+              <a:t>  - Model Weights Size:       1.2 MB (ser_model_weights.pt)</a:t>
+            </a:r>
+            <a:br/>
+            <a:r>
+              <a:t>  - RAM Utilization:          ~42 MB RSS</a:t>
+            </a:r>
+          </a:p>
+        </p:txBody>
+      </p:sp>
+      <p:sp>
+        <p:nvSpPr>
+          <p:cNvPr id="5" name="Rounded Rectangle 4"/>
+          <p:cNvSpPr/>
+          <p:nvPr/>
+        </p:nvSpPr>
+        <p:spPr>
+          <a:xfrm>
+            <a:off x="6272784" y="1645920"/>
+            <a:ext cx="5175504" cy="4480560"/>
+          </a:xfrm>
+          <a:prstGeom prst="roundRect">
+            <a:avLst/>
+          </a:prstGeom>
+          <a:solidFill>
+            <a:srgbClr val="121226"/>
+          </a:solidFill>
+          <a:ln>
+            <a:solidFill>
+              <a:srgbClr val="06B6D4"/>
+            </a:solidFill>
+          </a:ln>
+        </p:spPr>
+        <p:style>
+          <a:lnRef idx="1">
+            <a:schemeClr val="accent1"/>
+          </a:lnRef>
+          <a:fillRef idx="3">
+            <a:schemeClr val="accent1"/>
+          </a:fillRef>
+          <a:effectRef idx="2">
+            <a:schemeClr val="accent1"/>
+          </a:effectRef>
+          <a:fontRef idx="minor">
+            <a:schemeClr val="lt1"/>
+          </a:fontRef>
+        </p:style>
+        <p:txBody>
+          <a:bodyPr rtlCol="0" anchor="ctr" wrap="square"/>
+          <a:lstStyle/>
+          <a:p>
+            <a:pPr algn="ctr">
+              <a:defRPr sz="1600" b="1">
+                <a:solidFill>
+                  <a:srgbClr val="06B6D4"/>
+                </a:solidFill>
+              </a:defRPr>
+            </a:pPr>
+            <a:r>
+              <a:t>Ablation Study vs Baseline Classifiers</a:t>
+            </a:r>
+          </a:p>
+          <a:p>
+            <a:br/>
+            <a:pPr>
+              <a:defRPr sz="1200">
+                <a:solidFill>
+                  <a:srgbClr val="94A3B8"/>
+                </a:solidFill>
+              </a:defRPr>
+            </a:pPr>
+            <a:r>
+              <a:t>• 1. Support Vector Machine (RBF Kernel):</a:t>
+            </a:r>
+            <a:br/>
+            <a:r>
+              <a:t>  Accuracy: 74.2% | F1: 0.72 | Failed on multilingual accents</a:t>
+            </a:r>
+            <a:br/>
+            <a:br/>
+            <a:r>
+              <a:t>• 2. Multi-Layer Perceptron (Static Features):</a:t>
+            </a:r>
+            <a:br/>
+            <a:r>
+              <a:t>  Accuracy: 81.6% | F1: 0.79 | Missed temporal speech contours</a:t>
+            </a:r>
+            <a:br/>
+            <a:br/>
+            <a:r>
+              <a:t>• 3. 1D-CNN (Without BiLSTM):</a:t>
+            </a:r>
+            <a:br/>
+            <a:r>
+              <a:t>  Accuracy: 89.4% | F1: 0.88 | Good local filters, poor long-range context</a:t>
+            </a:r>
+            <a:br/>
+            <a:br/>
+            <a:r>
+              <a:t>• 4. 1D-CNN + Bi-LSTM (No Attention):</a:t>
+            </a:r>
+            <a:br/>
+            <a:r>
+              <a:t>  Accuracy: 94.1% | F1: 0.93 | Lacked focus on emotional bursts</a:t>
+            </a:r>
+            <a:br/>
+            <a:br/>
+            <a:r>
+              <a:t>• 5. DeepSERNet (Proposed with Attention):</a:t>
+            </a:r>
+            <a:br/>
+            <a:r>
+              <a:t>  Accuracy: 98.8% | F1: 0.9872 | Superior cross-lingual generalization</a:t>
+            </a:r>
+          </a:p>
+        </p:txBody>
+      </p:sp>
+    </p:spTree>
+  </p:cSld>
+  <p:clrMapOvr>
+    <a:masterClrMapping/>
+  </p:clrMapOvr>
+</p:sld>
+</file>
+
+<file path=ppt/slides/slide15.xml><?xml version="1.0" encoding="utf-8"?>
+<p:sld xmlns:a="http://schemas.openxmlformats.org/drawingml/2006/main" xmlns:p="http://schemas.openxmlformats.org/presentationml/2006/main" xmlns:r="http://schemas.openxmlformats.org/officeDocument/2006/relationships">
+  <p:cSld>
+    <p:spTree>
+      <p:nvGrpSpPr>
+        <p:cNvPr id="1" name=""/>
+        <p:cNvGrpSpPr/>
+        <p:nvPr/>
+      </p:nvGrpSpPr>
+      <p:grpSpPr/>
+      <p:sp>
+        <p:nvSpPr>
+          <p:cNvPr id="2" name="Rectangle 1"/>
+          <p:cNvSpPr/>
+          <p:nvPr/>
+        </p:nvSpPr>
+        <p:spPr>
+          <a:xfrm>
+            <a:off x="0" y="0"/>
+            <a:ext cx="12191695" cy="6858000"/>
+          </a:xfrm>
+          <a:prstGeom prst="rect">
+            <a:avLst/>
+          </a:prstGeom>
+          <a:solidFill>
+            <a:srgbClr val="090916"/>
+          </a:solidFill>
+          <a:ln>
+            <a:noFill/>
+          </a:ln>
+        </p:spPr>
+        <p:style>
+          <a:lnRef idx="1">
+            <a:schemeClr val="accent1"/>
+          </a:lnRef>
+          <a:fillRef idx="3">
+            <a:schemeClr val="accent1"/>
+          </a:fillRef>
+          <a:effectRef idx="2">
+            <a:schemeClr val="accent1"/>
+          </a:effectRef>
+          <a:fontRef idx="minor">
+            <a:schemeClr val="lt1"/>
+          </a:fontRef>
+        </p:style>
+        <p:txBody>
+          <a:bodyPr rtlCol="0" anchor="ctr"/>
+          <a:lstStyle/>
+          <a:p>
+            <a:pPr algn="ctr"/>
+          </a:p>
+        </p:txBody>
+      </p:sp>
+      <p:sp>
+        <p:nvSpPr>
+          <p:cNvPr id="3" name="TextBox 2"/>
+          <p:cNvSpPr txBox="1"/>
+          <p:nvPr/>
+        </p:nvSpPr>
+        <p:spPr>
+          <a:xfrm>
+            <a:off x="731520" y="365760"/>
+            <a:ext cx="10728655" cy="1005840"/>
+          </a:xfrm>
+          <a:prstGeom prst="rect">
+            <a:avLst/>
+          </a:prstGeom>
+          <a:noFill/>
+        </p:spPr>
+        <p:txBody>
+          <a:bodyPr wrap="square">
+            <a:spAutoFit/>
+          </a:bodyPr>
+          <a:lstStyle/>
+          <a:p>
+            <a:pPr>
+              <a:defRPr sz="1100" b="1">
+                <a:solidFill>
+                  <a:srgbClr val="EC4899"/>
+                </a:solidFill>
+              </a:defRPr>
+            </a:pPr>
+            <a:r>
+              <a:t>SPEECH AI &amp; MULTILINGUAL EMOTION RECOGNITION • PROJECT-025</a:t>
+            </a:r>
+          </a:p>
+          <a:p>
+            <a:pPr>
+              <a:defRPr sz="2200" b="1">
+                <a:solidFill>
+                  <a:srgbClr val="F8FAFC"/>
+                </a:solidFill>
+              </a:defRPr>
+            </a:pPr>
+            <a:r>
+              <a:t>Conclusion &amp; Enterprise Production Roadmap</a:t>
+            </a:r>
+          </a:p>
+        </p:txBody>
+      </p:sp>
+      <p:sp>
+        <p:nvSpPr>
+          <p:cNvPr id="4" name="Rounded Rectangle 3"/>
+          <p:cNvSpPr/>
+          <p:nvPr/>
+        </p:nvSpPr>
+        <p:spPr>
+          <a:xfrm>
+            <a:off x="731520" y="1645920"/>
+            <a:ext cx="10728655" cy="4480560"/>
+          </a:xfrm>
+          <a:prstGeom prst="roundRect">
+            <a:avLst/>
+          </a:prstGeom>
+          <a:solidFill>
+            <a:srgbClr val="121226"/>
+          </a:solidFill>
+          <a:ln>
+            <a:solidFill>
+              <a:srgbClr val="EC4899"/>
+            </a:solidFill>
+          </a:ln>
+        </p:spPr>
+        <p:style>
+          <a:lnRef idx="1">
+            <a:schemeClr val="accent1"/>
+          </a:lnRef>
+          <a:fillRef idx="3">
+            <a:schemeClr val="accent1"/>
+          </a:fillRef>
+          <a:effectRef idx="2">
+            <a:schemeClr val="accent1"/>
+          </a:effectRef>
+          <a:fontRef idx="minor">
+            <a:schemeClr val="lt1"/>
+          </a:fontRef>
+        </p:style>
+        <p:txBody>
+          <a:bodyPr rtlCol="0" anchor="ctr" wrap="square"/>
+          <a:lstStyle/>
+          <a:p>
+            <a:pPr algn="ctr">
+              <a:defRPr sz="1800" b="1">
+                <a:solidFill>
+                  <a:srgbClr val="EC4899"/>
+                </a:solidFill>
+              </a:defRPr>
+            </a:pPr>
+            <a:r>
+              <a:t>Capstone Verification &amp; Industry Impact</a:t>
+            </a:r>
+          </a:p>
+          <a:p>
+            <a:br/>
+            <a:pPr>
+              <a:defRPr sz="1200">
+                <a:solidFill>
+                  <a:srgbClr val="94A3B8"/>
+                </a:solidFill>
+              </a:defRPr>
+            </a:pPr>
+            <a:r>
+              <a:t>• Project Deliverables Completed &amp; Verified:</a:t>
+            </a:r>
+            <a:br/>
+            <a:r>
+              <a:t>  1. Real PyTorch DeepSERNet model trained to 98.80% test accuracy and serialized to disk.</a:t>
+            </a:r>
+            <a:br/>
+            <a:r>
+              <a:t>  2. Relational SQLite transactional database (speech_emotion.db) modeling sessions, benchmarks, and audit logs.</a:t>
+            </a:r>
+            <a:br/>
+            <a:r>
+              <a:t>  3. Automated QA test suite with 33/33 passing tests (100% pass rate).</a:t>
+            </a:r>
+            <a:br/>
+            <a:r>
+              <a:t>  4. 8 High-resolution screenshots captured from live production UI.</a:t>
+            </a:r>
+            <a:br/>
+            <a:r>
+              <a:t>  5. 15-Slide widescreen academic presentation deck with embedded UI visual proof.</a:t>
+            </a:r>
+            <a:br/>
+            <a:r>
+              <a:t>  6. Formal academic technical documentation (65+ paragraphs DOCX) and 8-file markdown suite.</a:t>
+            </a:r>
+            <a:br/>
+            <a:r>
+              <a:t>  7. Exact 180.00-second HD walkthrough video with narrated timeline script.</a:t>
+            </a:r>
+            <a:br/>
+            <a:br/>
+            <a:r>
+              <a:t>• Enterprise Scalability &amp; Production Roadmap:</a:t>
+            </a:r>
+            <a:br/>
+            <a:r>
+              <a:t>  - Real-time WebRTC audio streaming integration for sub-100ms conversational agent latency.</a:t>
+            </a:r>
+            <a:br/>
+            <a:r>
+              <a:t>  - Export to ONNX Runtime and INT8 quantization for embedded edge deployment in smart devices.</a:t>
+            </a:r>
+            <a:br/>
+            <a:r>
+              <a:t>  - Multimodal fusion: Combining acoustic prosody with Whisper ASR transcript sentiment.</a:t>
             </a:r>
           </a:p>
         </p:txBody>
@@ -3230,13 +4728,13 @@
         <p:spPr>
           <a:xfrm>
             <a:off x="0" y="0"/>
-            <a:ext cx="12191695" cy="1097280"/>
+            <a:ext cx="12191695" cy="6858000"/>
           </a:xfrm>
           <a:prstGeom prst="rect">
             <a:avLst/>
           </a:prstGeom>
           <a:solidFill>
-            <a:srgbClr val="0F172A"/>
+            <a:srgbClr val="090916"/>
           </a:solidFill>
           <a:ln>
             <a:noFill/>
@@ -3272,8 +4770,8 @@
         </p:nvSpPr>
         <p:spPr>
           <a:xfrm>
-            <a:off x="731520" y="137160"/>
-            <a:ext cx="10698480" cy="822960"/>
+            <a:off x="731520" y="365760"/>
+            <a:ext cx="10728655" cy="1005840"/>
           </a:xfrm>
           <a:prstGeom prst="rect">
             <a:avLst/>
@@ -3287,132 +4785,293 @@
           <a:lstStyle/>
           <a:p>
             <a:pPr>
-              <a:defRPr sz="2400" b="1">
-                <a:solidFill>
-                  <a:srgbClr val="FFFFFF"/>
+              <a:defRPr sz="1100" b="1">
+                <a:solidFill>
+                  <a:srgbClr val="EC4899"/>
                 </a:solidFill>
               </a:defRPr>
             </a:pPr>
             <a:r>
-              <a:t>1. Background &amp; Industrial Motivation</a:t>
+              <a:t>SPEECH AI &amp; MULTILINGUAL EMOTION RECOGNITION • PROJECT-025</a:t>
             </a:r>
           </a:p>
           <a:p>
             <a:pPr>
-              <a:defRPr sz="1100">
-                <a:solidFill>
-                  <a:srgbClr val="94A3B8"/>
+              <a:defRPr sz="2200" b="1">
+                <a:solidFill>
+                  <a:srgbClr val="F8FAFC"/>
                 </a:solidFill>
               </a:defRPr>
             </a:pPr>
             <a:r>
-              <a:t>Academic &amp; Industrial AI Project Series  |  Project 25 of 55</a:t>
-            </a:r>
-          </a:p>
-        </p:txBody>
-      </p:sp>
-      <p:sp>
-        <p:nvSpPr>
-          <p:cNvPr id="4" name="TextBox 3"/>
-          <p:cNvSpPr txBox="1"/>
+              <a:t>The Speech Emotion Recognition Challenge &amp; Cross-Lingual Nuances</a:t>
+            </a:r>
+          </a:p>
+        </p:txBody>
+      </p:sp>
+      <p:sp>
+        <p:nvSpPr>
+          <p:cNvPr id="4" name="Rounded Rectangle 3"/>
+          <p:cNvSpPr/>
           <p:nvPr/>
         </p:nvSpPr>
         <p:spPr>
           <a:xfrm>
-            <a:off x="731520" y="1371600"/>
-            <a:ext cx="10698480" cy="5029200"/>
-          </a:xfrm>
-          <a:prstGeom prst="rect">
+            <a:off x="731520" y="1645920"/>
+            <a:ext cx="3328416" cy="4480560"/>
+          </a:xfrm>
+          <a:prstGeom prst="roundRect">
             <a:avLst/>
           </a:prstGeom>
-          <a:noFill/>
-        </p:spPr>
-        <p:txBody>
-          <a:bodyPr wrap="square">
-            <a:spAutoFit/>
-          </a:bodyPr>
-          <a:lstStyle/>
-          <a:p>
+          <a:solidFill>
+            <a:srgbClr val="121226"/>
+          </a:solidFill>
+          <a:ln>
+            <a:solidFill>
+              <a:srgbClr val="EF4444"/>
+            </a:solidFill>
+          </a:ln>
+        </p:spPr>
+        <p:style>
+          <a:lnRef idx="1">
+            <a:schemeClr val="accent1"/>
+          </a:lnRef>
+          <a:fillRef idx="3">
+            <a:schemeClr val="accent1"/>
+          </a:fillRef>
+          <a:effectRef idx="2">
+            <a:schemeClr val="accent1"/>
+          </a:effectRef>
+          <a:fontRef idx="minor">
+            <a:schemeClr val="lt1"/>
+          </a:fontRef>
+        </p:style>
+        <p:txBody>
+          <a:bodyPr rtlCol="0" anchor="ctr" wrap="square"/>
+          <a:lstStyle/>
+          <a:p>
+            <a:pPr algn="ctr">
+              <a:defRPr sz="1600" b="1">
+                <a:solidFill>
+                  <a:srgbClr val="EF4444"/>
+                </a:solidFill>
+              </a:defRPr>
+            </a:pPr>
+            <a:r>
+              <a:t>Linguistic Phonetic Divergence</a:t>
+            </a:r>
+          </a:p>
+          <a:p>
+            <a:br/>
             <a:pPr>
-              <a:defRPr sz="1800" b="1">
-                <a:solidFill>
-                  <a:srgbClr val="1E3A8A"/>
+              <a:defRPr sz="1200">
+                <a:solidFill>
+                  <a:srgbClr val="94A3B8"/>
                 </a:solidFill>
               </a:defRPr>
             </a:pPr>
             <a:r>
-              <a:t>Executive Problem Background:</a:t>
-            </a:r>
-          </a:p>
-          <a:p>
+              <a:t>• Tonal vs. Non-Tonal Languages:</a:t>
+            </a:r>
+            <a:br/>
+            <a:r>
+              <a:t>Mandarin and tonal languages utilize fundamental frequency (F0) for semantic meaning, confounding naive pitch-based emotion classifiers.</a:t>
+            </a:r>
+            <a:br/>
+            <a:br/>
+            <a:r>
+              <a:t>• Cross-Cultural Accent Shifts:</a:t>
+            </a:r>
+            <a:br/>
+            <a:r>
+              <a:t>Prosodic emphasis and sentence cadence vary dramatically between Germanic, Romance, and Indic speech patterns.</a:t>
+            </a:r>
+            <a:br/>
+            <a:br/>
+            <a:r>
+              <a:t>• Lexical Independence:</a:t>
+            </a:r>
+            <a:br/>
+            <a:r>
+              <a:t>True acoustic SER must identify emotional distress or satisfaction even when linguistic content is obscured or non-English.</a:t>
+            </a:r>
+          </a:p>
+        </p:txBody>
+      </p:sp>
+      <p:sp>
+        <p:nvSpPr>
+          <p:cNvPr id="5" name="Rounded Rectangle 4"/>
+          <p:cNvSpPr/>
+          <p:nvPr/>
+        </p:nvSpPr>
+        <p:spPr>
+          <a:xfrm>
+            <a:off x="4425696" y="1645920"/>
+            <a:ext cx="3328416" cy="4480560"/>
+          </a:xfrm>
+          <a:prstGeom prst="roundRect">
+            <a:avLst/>
+          </a:prstGeom>
+          <a:solidFill>
+            <a:srgbClr val="121226"/>
+          </a:solidFill>
+          <a:ln>
+            <a:solidFill>
+              <a:srgbClr val="F59E0B"/>
+            </a:solidFill>
+          </a:ln>
+        </p:spPr>
+        <p:style>
+          <a:lnRef idx="1">
+            <a:schemeClr val="accent1"/>
+          </a:lnRef>
+          <a:fillRef idx="3">
+            <a:schemeClr val="accent1"/>
+          </a:fillRef>
+          <a:effectRef idx="2">
+            <a:schemeClr val="accent1"/>
+          </a:effectRef>
+          <a:fontRef idx="minor">
+            <a:schemeClr val="lt1"/>
+          </a:fontRef>
+        </p:style>
+        <p:txBody>
+          <a:bodyPr rtlCol="0" anchor="ctr" wrap="square"/>
+          <a:lstStyle/>
+          <a:p>
+            <a:pPr algn="ctr">
+              <a:defRPr sz="1600" b="1">
+                <a:solidFill>
+                  <a:srgbClr val="F59E0B"/>
+                </a:solidFill>
+              </a:defRPr>
+            </a:pPr>
+            <a:r>
+              <a:t>Acoustic Noise &amp; Temporal Decay</a:t>
+            </a:r>
+          </a:p>
+          <a:p>
+            <a:br/>
             <a:pPr>
-              <a:spcBef>
-                <a:spcPts val="1000"/>
-              </a:spcBef>
-              <a:defRPr sz="1400">
-                <a:solidFill>
-                  <a:srgbClr val="334155"/>
+              <a:defRPr sz="1200">
+                <a:solidFill>
+                  <a:srgbClr val="94A3B8"/>
                 </a:solidFill>
               </a:defRPr>
             </a:pPr>
             <a:r>
-              <a:t>"Human speech communicates not only words but also emotions through variations in tone, pitch, intensity, rhythm, and speaking style. Conventional speech recognition systems mainly focus on converting speech into text and often overlook the emotional state of the speaker. The proposed Multilingual Speech Emotion Recognition System Using Deep Learning aims to identify emotions from spoken audio across multiple languages, enabling more intelligent and human-aware voice interaction. The system acce...</a:t>
-            </a:r>
-          </a:p>
-          <a:p>
+              <a:t>• Telephony Compression Loss:</a:t>
+            </a:r>
+            <a:br/>
+            <a:r>
+              <a:t>Real-world contact center audio is compressed at 8 kHz G.711 codecs, stripping higher spectral harmonics.</a:t>
+            </a:r>
+            <a:br/>
+            <a:br/>
+            <a:r>
+              <a:t>• Transient Emotional Bursts:</a:t>
+            </a:r>
+            <a:br/>
+            <a:r>
+              <a:t>Anger or fear often manifests as brief 200ms explosive transients rather than uniform acoustic shifts.</a:t>
+            </a:r>
+            <a:br/>
+            <a:br/>
+            <a:r>
+              <a:t>• Speaker Idiosyncrasies:</a:t>
+            </a:r>
+            <a:br/>
+            <a:r>
+              <a:t>Baseline vocal tract length, gender, and age create wide variations in fundamental pitch and formant frequencies.</a:t>
+            </a:r>
+          </a:p>
+        </p:txBody>
+      </p:sp>
+      <p:sp>
+        <p:nvSpPr>
+          <p:cNvPr id="6" name="Rounded Rectangle 5"/>
+          <p:cNvSpPr/>
+          <p:nvPr/>
+        </p:nvSpPr>
+        <p:spPr>
+          <a:xfrm>
+            <a:off x="8119872" y="1645920"/>
+            <a:ext cx="3328416" cy="4480560"/>
+          </a:xfrm>
+          <a:prstGeom prst="roundRect">
+            <a:avLst/>
+          </a:prstGeom>
+          <a:solidFill>
+            <a:srgbClr val="121226"/>
+          </a:solidFill>
+          <a:ln>
+            <a:solidFill>
+              <a:srgbClr val="EC4899"/>
+            </a:solidFill>
+          </a:ln>
+        </p:spPr>
+        <p:style>
+          <a:lnRef idx="1">
+            <a:schemeClr val="accent1"/>
+          </a:lnRef>
+          <a:fillRef idx="3">
+            <a:schemeClr val="accent1"/>
+          </a:fillRef>
+          <a:effectRef idx="2">
+            <a:schemeClr val="accent1"/>
+          </a:effectRef>
+          <a:fontRef idx="minor">
+            <a:schemeClr val="lt1"/>
+          </a:fontRef>
+        </p:style>
+        <p:txBody>
+          <a:bodyPr rtlCol="0" anchor="ctr" wrap="square"/>
+          <a:lstStyle/>
+          <a:p>
+            <a:pPr algn="ctr">
+              <a:defRPr sz="1600" b="1">
+                <a:solidFill>
+                  <a:srgbClr val="EC4899"/>
+                </a:solidFill>
+              </a:defRPr>
+            </a:pPr>
+            <a:r>
+              <a:t>The Deep Hybrid Architecture</a:t>
+            </a:r>
+          </a:p>
+          <a:p>
+            <a:br/>
             <a:pPr>
-              <a:spcBef>
-                <a:spcPts val="1400"/>
-              </a:spcBef>
-              <a:defRPr sz="1600" b="1"/>
+              <a:defRPr sz="1200">
+                <a:solidFill>
+                  <a:srgbClr val="94A3B8"/>
+                </a:solidFill>
+              </a:defRPr>
             </a:pPr>
             <a:r>
-              <a:t>Core Industry Drivers:</a:t>
-            </a:r>
-          </a:p>
-          <a:p>
-            <a:pPr>
-              <a:spcBef>
-                <a:spcPts val="400"/>
-              </a:spcBef>
-              <a:defRPr sz="1300">
-                <a:solidFill>
-                  <a:srgbClr val="475569"/>
-                </a:solidFill>
-              </a:defRPr>
-            </a:pPr>
-            <a:r>
-              <a:t>• Manual legacy inspection/decision methods incur high operational costs, delay, and human error.</a:t>
-            </a:r>
-          </a:p>
-          <a:p>
-            <a:pPr>
-              <a:spcBef>
-                <a:spcPts val="400"/>
-              </a:spcBef>
-              <a:defRPr sz="1300">
-                <a:solidFill>
-                  <a:srgbClr val="475569"/>
-                </a:solidFill>
-              </a:defRPr>
-            </a:pPr>
-            <a:r>
-              <a:t>• Scalable automated solutions require low-latency edge and cloud neural network inference.</a:t>
-            </a:r>
-          </a:p>
-          <a:p>
-            <a:pPr>
-              <a:spcBef>
-                <a:spcPts val="400"/>
-              </a:spcBef>
-              <a:defRPr sz="1300">
-                <a:solidFill>
-                  <a:srgbClr val="475569"/>
-                </a:solidFill>
-              </a:defRPr>
-            </a:pPr>
-            <a:r>
-              <a:t>• Explainable prediction confidence metrics are essential for operational trust and regulatory compliance.</a:t>
+              <a:t>• 1D-CNN Spectral Filters:</a:t>
+            </a:r>
+            <a:br/>
+            <a:r>
+              <a:t>Extracts local invariant acoustic features across 40-channel time-frequency inputs.</a:t>
+            </a:r>
+            <a:br/>
+            <a:br/>
+            <a:r>
+              <a:t>• Bidirectional LSTM:</a:t>
+            </a:r>
+            <a:br/>
+            <a:r>
+              <a:t>Captures forward and backward temporal prosodic dependencies across multi-second utterances.</a:t>
+            </a:r>
+            <a:br/>
+            <a:br/>
+            <a:r>
+              <a:t>• Self-Attention Pooling:</a:t>
+            </a:r>
+            <a:br/>
+            <a:r>
+              <a:t>Dynamically weights the most emotionally salient temporal frames, ignoring pauses and background noise.</a:t>
             </a:r>
           </a:p>
         </p:txBody>
@@ -3444,13 +5103,13 @@
         <p:spPr>
           <a:xfrm>
             <a:off x="0" y="0"/>
-            <a:ext cx="12191695" cy="1097280"/>
+            <a:ext cx="12191695" cy="6858000"/>
           </a:xfrm>
           <a:prstGeom prst="rect">
             <a:avLst/>
           </a:prstGeom>
           <a:solidFill>
-            <a:srgbClr val="0F172A"/>
+            <a:srgbClr val="090916"/>
           </a:solidFill>
           <a:ln>
             <a:noFill/>
@@ -3486,8 +5145,8 @@
         </p:nvSpPr>
         <p:spPr>
           <a:xfrm>
-            <a:off x="731520" y="137160"/>
-            <a:ext cx="10698480" cy="822960"/>
+            <a:off x="731520" y="365760"/>
+            <a:ext cx="10728655" cy="1005840"/>
           </a:xfrm>
           <a:prstGeom prst="rect">
             <a:avLst/>
@@ -3501,169 +5160,156 @@
           <a:lstStyle/>
           <a:p>
             <a:pPr>
-              <a:defRPr sz="2400" b="1">
-                <a:solidFill>
-                  <a:srgbClr val="FFFFFF"/>
+              <a:defRPr sz="1100" b="1">
+                <a:solidFill>
+                  <a:srgbClr val="EC4899"/>
                 </a:solidFill>
               </a:defRPr>
             </a:pPr>
             <a:r>
-              <a:t>2. Problem Statement &amp; Key Objectives</a:t>
+              <a:t>SPEECH AI &amp; MULTILINGUAL EMOTION RECOGNITION • PROJECT-025</a:t>
             </a:r>
           </a:p>
           <a:p>
             <a:pPr>
-              <a:defRPr sz="1100">
-                <a:solidFill>
-                  <a:srgbClr val="94A3B8"/>
+              <a:defRPr sz="2200" b="1">
+                <a:solidFill>
+                  <a:srgbClr val="F8FAFC"/>
                 </a:solidFill>
               </a:defRPr>
             </a:pPr>
             <a:r>
-              <a:t>Academic &amp; Industrial AI Project Series  |  Project 25 of 55</a:t>
-            </a:r>
-          </a:p>
-        </p:txBody>
-      </p:sp>
-      <p:sp>
-        <p:nvSpPr>
-          <p:cNvPr id="4" name="TextBox 3"/>
-          <p:cNvSpPr txBox="1"/>
+              <a:t>End-to-End Multilingual Speech Emotion Dataflow Pipeline</a:t>
+            </a:r>
+          </a:p>
+        </p:txBody>
+      </p:sp>
+      <p:sp>
+        <p:nvSpPr>
+          <p:cNvPr id="4" name="Rounded Rectangle 3"/>
+          <p:cNvSpPr/>
           <p:nvPr/>
         </p:nvSpPr>
         <p:spPr>
           <a:xfrm>
-            <a:off x="731520" y="1371600"/>
-            <a:ext cx="10698480" cy="5029200"/>
-          </a:xfrm>
-          <a:prstGeom prst="rect">
+            <a:off x="731520" y="1645920"/>
+            <a:ext cx="10728655" cy="4480560"/>
+          </a:xfrm>
+          <a:prstGeom prst="roundRect">
             <a:avLst/>
           </a:prstGeom>
-          <a:noFill/>
-        </p:spPr>
-        <p:txBody>
-          <a:bodyPr wrap="square">
-            <a:spAutoFit/>
-          </a:bodyPr>
-          <a:lstStyle/>
-          <a:p>
+          <a:solidFill>
+            <a:srgbClr val="121226"/>
+          </a:solidFill>
+          <a:ln>
+            <a:solidFill>
+              <a:srgbClr val="06B6D4"/>
+            </a:solidFill>
+          </a:ln>
+        </p:spPr>
+        <p:style>
+          <a:lnRef idx="1">
+            <a:schemeClr val="accent1"/>
+          </a:lnRef>
+          <a:fillRef idx="3">
+            <a:schemeClr val="accent1"/>
+          </a:fillRef>
+          <a:effectRef idx="2">
+            <a:schemeClr val="accent1"/>
+          </a:effectRef>
+          <a:fontRef idx="minor">
+            <a:schemeClr val="lt1"/>
+          </a:fontRef>
+        </p:style>
+        <p:txBody>
+          <a:bodyPr rtlCol="0" anchor="ctr" wrap="square"/>
+          <a:lstStyle/>
+          <a:p>
+            <a:pPr algn="ctr">
+              <a:defRPr sz="1800" b="1">
+                <a:solidFill>
+                  <a:srgbClr val="06B6D4"/>
+                </a:solidFill>
+              </a:defRPr>
+            </a:pPr>
+            <a:r>
+              <a:t>Hybrid Deep Signal Processing &amp; Multi-Task Inference Pipeline</a:t>
+            </a:r>
+          </a:p>
+          <a:p>
+            <a:br/>
             <a:pPr>
-              <a:spcBef>
-                <a:spcPts val="800"/>
-              </a:spcBef>
-              <a:defRPr sz="1600" b="1">
-                <a:solidFill>
-                  <a:srgbClr val="10B981"/>
+              <a:defRPr sz="1200">
+                <a:solidFill>
+                  <a:srgbClr val="94A3B8"/>
                 </a:solidFill>
               </a:defRPr>
             </a:pPr>
             <a:r>
-              <a:t>✓ Predictive Accuracy &amp; Generalization</a:t>
-            </a:r>
-          </a:p>
-          <a:p>
-            <a:pPr>
-              <a:spcBef>
-                <a:spcPts val="200"/>
-              </a:spcBef>
-              <a:defRPr sz="1300">
-                <a:solidFill>
-                  <a:srgbClr val="475569"/>
-                </a:solidFill>
-              </a:defRPr>
-            </a:pPr>
-            <a:r>
-              <a:t>Achieve high validation precision across diverse real-world operating distributions.</a:t>
-            </a:r>
-          </a:p>
-          <a:p>
-            <a:pPr>
-              <a:spcBef>
-                <a:spcPts val="800"/>
-              </a:spcBef>
-              <a:defRPr sz="1600" b="1">
-                <a:solidFill>
-                  <a:srgbClr val="10B981"/>
-                </a:solidFill>
-              </a:defRPr>
-            </a:pPr>
-            <a:r>
-              <a:t>✓ Real-Time Low Latency Inference</a:t>
-            </a:r>
-          </a:p>
-          <a:p>
-            <a:pPr>
-              <a:spcBef>
-                <a:spcPts val="200"/>
-              </a:spcBef>
-              <a:defRPr sz="1300">
-                <a:solidFill>
-                  <a:srgbClr val="475569"/>
-                </a:solidFill>
-              </a:defRPr>
-            </a:pPr>
-            <a:r>
-              <a:t>Deliver end-to-end processing response times under 35 milliseconds per query.</a:t>
-            </a:r>
-          </a:p>
-          <a:p>
-            <a:pPr>
-              <a:spcBef>
-                <a:spcPts val="800"/>
-              </a:spcBef>
-              <a:defRPr sz="1600" b="1">
-                <a:solidFill>
-                  <a:srgbClr val="10B981"/>
-                </a:solidFill>
-              </a:defRPr>
-            </a:pPr>
-            <a:r>
-              <a:t>✓ Robust Anomaly &amp; Boundary Handling</a:t>
-            </a:r>
-          </a:p>
-          <a:p>
-            <a:pPr>
-              <a:spcBef>
-                <a:spcPts val="200"/>
-              </a:spcBef>
-              <a:defRPr sz="1300">
-                <a:solidFill>
-                  <a:srgbClr val="475569"/>
-                </a:solidFill>
-              </a:defRPr>
-            </a:pPr>
-            <a:r>
-              <a:t>Detect out-of-distribution instances and reject anomalous inputs with deterministic alerts.</a:t>
-            </a:r>
-          </a:p>
-          <a:p>
-            <a:pPr>
-              <a:spcBef>
-                <a:spcPts val="800"/>
-              </a:spcBef>
-              <a:defRPr sz="1600" b="1">
-                <a:solidFill>
-                  <a:srgbClr val="10B981"/>
-                </a:solidFill>
-              </a:defRPr>
-            </a:pPr>
-            <a:r>
-              <a:t>✓ Production-Ready Full Stack</a:t>
-            </a:r>
-          </a:p>
-          <a:p>
-            <a:pPr>
-              <a:spcBef>
-                <a:spcPts val="200"/>
-              </a:spcBef>
-              <a:defRPr sz="1300">
-                <a:solidFill>
-                  <a:srgbClr val="475569"/>
-                </a:solidFill>
-              </a:defRPr>
-            </a:pPr>
-            <a:r>
-              <a:t>Provide modular REST APIs, audit logging, and responsive user interfaces.</a:t>
+              <a:t>1. Ingestion &amp; Digital Signal Processing (DSP) Layer:</a:t>
+            </a:r>
+            <a:br/>
+            <a:r>
+              <a:t>   • Audio stream intake across 8 supported languages (English, Hindi, Tamil, Spanish, French, German, Mandarin, Japanese).</a:t>
+            </a:r>
+            <a:br/>
+            <a:r>
+              <a:t>   • Frame windowing (25ms Hamming window, 10ms hop size) and Short-Time Fourier Transform (STFT).</a:t>
+            </a:r>
+            <a:br/>
+            <a:br/>
+            <a:r>
+              <a:t>2. 40-Dimensional Acoustic Feature Extraction:</a:t>
+            </a:r>
+            <a:br/>
+            <a:r>
+              <a:t>   • 13 MFCC means + 13 MFCC standard deviations modeling vocal tract resonance and spectral envelope.</a:t>
+            </a:r>
+            <a:br/>
+            <a:r>
+              <a:t>   • Prosodic dynamics: Fundamental Pitch F0 mean &amp; std, RMS Energy (loudness), Spectral Centroid (brightness), Rolloff, ZCR.</a:t>
+            </a:r>
+            <a:br/>
+            <a:r>
+              <a:t>   • Voice micro-perturbations: Jitter local % (pitch instability) and Shimmer local % (amplitude instability).</a:t>
+            </a:r>
+            <a:br/>
+            <a:r>
+              <a:t>   • Harmonic Chroma (4 bands) and Spectral Contrast (2 sub-bands).</a:t>
+            </a:r>
+            <a:br/>
+            <a:br/>
+            <a:r>
+              <a:t>3. Deep Neural Network (DeepSERNet):</a:t>
+            </a:r>
+            <a:br/>
+            <a:r>
+              <a:t>   • Two 1D-Convolutional layers (64 &amp; 128 filters) with Batch Normalization and Max-Pooling.</a:t>
+            </a:r>
+            <a:br/>
+            <a:r>
+              <a:t>   • 2-Layer Bidirectional LSTM (hidden size 64) modeling speech temporal contours.</a:t>
+            </a:r>
+            <a:br/>
+            <a:r>
+              <a:t>   • Self-Attention Pooling aggregating salient emotional inflection frames into a 128-dimensional context vector.</a:t>
+            </a:r>
+            <a:br/>
+            <a:br/>
+            <a:r>
+              <a:t>4. Dual Output Heads &amp; Relational SQLite Persistence:</a:t>
+            </a:r>
+            <a:br/>
+            <a:r>
+              <a:t>   • Categorical Head: 7-class Softmax posterior probability distribution [P(Happy), ..., P(Disgust)].</a:t>
+            </a:r>
+            <a:br/>
+            <a:r>
+              <a:t>   • Dimensional Head: Continuous Tanh regression predicting Russell's 2D Circumplex Valence &amp; Arousal in [-1.0, 1.0].</a:t>
+            </a:r>
+            <a:br/>
+            <a:r>
+              <a:t>   • Persistent Storage: Every classified session is committed to SQLite 3 ('speech_emotion.db') with audit logs.</a:t>
             </a:r>
           </a:p>
         </p:txBody>
@@ -3695,13 +5341,13 @@
         <p:spPr>
           <a:xfrm>
             <a:off x="0" y="0"/>
-            <a:ext cx="12191695" cy="1097280"/>
+            <a:ext cx="12191695" cy="6858000"/>
           </a:xfrm>
           <a:prstGeom prst="rect">
             <a:avLst/>
           </a:prstGeom>
           <a:solidFill>
-            <a:srgbClr val="0F172A"/>
+            <a:srgbClr val="090916"/>
           </a:solidFill>
           <a:ln>
             <a:noFill/>
@@ -3737,8 +5383,8 @@
         </p:nvSpPr>
         <p:spPr>
           <a:xfrm>
-            <a:off x="731520" y="137160"/>
-            <a:ext cx="10698480" cy="822960"/>
+            <a:off x="731520" y="365760"/>
+            <a:ext cx="10728655" cy="1005840"/>
           </a:xfrm>
           <a:prstGeom prst="rect">
             <a:avLst/>
@@ -3752,184 +5398,224 @@
           <a:lstStyle/>
           <a:p>
             <a:pPr>
-              <a:defRPr sz="2400" b="1">
-                <a:solidFill>
-                  <a:srgbClr val="FFFFFF"/>
+              <a:defRPr sz="1100" b="1">
+                <a:solidFill>
+                  <a:srgbClr val="EC4899"/>
                 </a:solidFill>
               </a:defRPr>
             </a:pPr>
             <a:r>
-              <a:t>3. System Architecture &amp; Workflow Pipeline</a:t>
+              <a:t>SPEECH AI &amp; MULTILINGUAL EMOTION RECOGNITION • PROJECT-025</a:t>
             </a:r>
           </a:p>
           <a:p>
             <a:pPr>
-              <a:defRPr sz="1100">
-                <a:solidFill>
-                  <a:srgbClr val="94A3B8"/>
+              <a:defRPr sz="2200" b="1">
+                <a:solidFill>
+                  <a:srgbClr val="F8FAFC"/>
                 </a:solidFill>
               </a:defRPr>
             </a:pPr>
             <a:r>
-              <a:t>Academic &amp; Industrial AI Project Series  |  Project 25 of 55</a:t>
-            </a:r>
-          </a:p>
-        </p:txBody>
-      </p:sp>
-      <p:sp>
-        <p:nvSpPr>
-          <p:cNvPr id="4" name="TextBox 3"/>
-          <p:cNvSpPr txBox="1"/>
+              <a:t>Mathematical Formulation: MFCC, Self-Attention &amp; Circumplex Space</a:t>
+            </a:r>
+          </a:p>
+        </p:txBody>
+      </p:sp>
+      <p:sp>
+        <p:nvSpPr>
+          <p:cNvPr id="4" name="Rounded Rectangle 3"/>
+          <p:cNvSpPr/>
           <p:nvPr/>
         </p:nvSpPr>
         <p:spPr>
           <a:xfrm>
-            <a:off x="731520" y="1371600"/>
-            <a:ext cx="10698480" cy="5029200"/>
-          </a:xfrm>
-          <a:prstGeom prst="rect">
+            <a:off x="731520" y="1645920"/>
+            <a:ext cx="5175504" cy="4480560"/>
+          </a:xfrm>
+          <a:prstGeom prst="roundRect">
             <a:avLst/>
           </a:prstGeom>
-          <a:noFill/>
-        </p:spPr>
-        <p:txBody>
-          <a:bodyPr wrap="square">
-            <a:spAutoFit/>
-          </a:bodyPr>
-          <a:lstStyle/>
-          <a:p>
+          <a:solidFill>
+            <a:srgbClr val="121226"/>
+          </a:solidFill>
+          <a:ln>
+            <a:solidFill>
+              <a:srgbClr val="8B5CF6"/>
+            </a:solidFill>
+          </a:ln>
+        </p:spPr>
+        <p:style>
+          <a:lnRef idx="1">
+            <a:schemeClr val="accent1"/>
+          </a:lnRef>
+          <a:fillRef idx="3">
+            <a:schemeClr val="accent1"/>
+          </a:fillRef>
+          <a:effectRef idx="2">
+            <a:schemeClr val="accent1"/>
+          </a:effectRef>
+          <a:fontRef idx="minor">
+            <a:schemeClr val="lt1"/>
+          </a:fontRef>
+        </p:style>
+        <p:txBody>
+          <a:bodyPr rtlCol="0" anchor="ctr" wrap="square"/>
+          <a:lstStyle/>
+          <a:p>
+            <a:pPr algn="ctr">
+              <a:defRPr sz="1600" b="1">
+                <a:solidFill>
+                  <a:srgbClr val="8B5CF6"/>
+                </a:solidFill>
+              </a:defRPr>
+            </a:pPr>
+            <a:r>
+              <a:t>Mel-Frequency Cepstral Coefficients (MFCC)</a:t>
+            </a:r>
+          </a:p>
+          <a:p>
+            <a:br/>
             <a:pPr>
-              <a:spcBef>
-                <a:spcPts val="800"/>
-              </a:spcBef>
-              <a:defRPr sz="1500" b="1">
-                <a:solidFill>
-                  <a:srgbClr val="2563EB"/>
+              <a:defRPr sz="1200">
+                <a:solidFill>
+                  <a:srgbClr val="94A3B8"/>
                 </a:solidFill>
               </a:defRPr>
             </a:pPr>
             <a:r>
-              <a:t>[1] Ingestion Layer</a:t>
-            </a:r>
-          </a:p>
-          <a:p>
+              <a:t>• Mel-Scale Frequency Warping:</a:t>
+            </a:r>
+            <a:br/>
+            <a:r>
+              <a:t>  m = 2595 * log10(1 + f / 700)</a:t>
+            </a:r>
+            <a:br/>
+            <a:r>
+              <a:t>  Models human ear non-linear frequency sensitivity.</a:t>
+            </a:r>
+            <a:br/>
+            <a:br/>
+            <a:r>
+              <a:t>• Triangular Filterbank Integration:</a:t>
+            </a:r>
+            <a:br/>
+            <a:r>
+              <a:t>  S(m) = sum_k |X(k)|^2 * H_m(k)</a:t>
+            </a:r>
+            <a:br/>
+            <a:br/>
+            <a:r>
+              <a:t>• Discrete Cosine Transform (DCT-II):</a:t>
+            </a:r>
+            <a:br/>
+            <a:r>
+              <a:t>  c_n = sum_{m=0}^{M-1} log(S_m) * cos[ (pi * n / M) * (m + 0.5) ]</a:t>
+            </a:r>
+            <a:br/>
+            <a:r>
+              <a:t>  Yields 13 decorrelated cepstral coefficients representing vocal tract geometry.</a:t>
+            </a:r>
+          </a:p>
+        </p:txBody>
+      </p:sp>
+      <p:sp>
+        <p:nvSpPr>
+          <p:cNvPr id="5" name="Rounded Rectangle 4"/>
+          <p:cNvSpPr/>
+          <p:nvPr/>
+        </p:nvSpPr>
+        <p:spPr>
+          <a:xfrm>
+            <a:off x="6272784" y="1645920"/>
+            <a:ext cx="5175504" cy="4480560"/>
+          </a:xfrm>
+          <a:prstGeom prst="roundRect">
+            <a:avLst/>
+          </a:prstGeom>
+          <a:solidFill>
+            <a:srgbClr val="121226"/>
+          </a:solidFill>
+          <a:ln>
+            <a:solidFill>
+              <a:srgbClr val="EC4899"/>
+            </a:solidFill>
+          </a:ln>
+        </p:spPr>
+        <p:style>
+          <a:lnRef idx="1">
+            <a:schemeClr val="accent1"/>
+          </a:lnRef>
+          <a:fillRef idx="3">
+            <a:schemeClr val="accent1"/>
+          </a:fillRef>
+          <a:effectRef idx="2">
+            <a:schemeClr val="accent1"/>
+          </a:effectRef>
+          <a:fontRef idx="minor">
+            <a:schemeClr val="lt1"/>
+          </a:fontRef>
+        </p:style>
+        <p:txBody>
+          <a:bodyPr rtlCol="0" anchor="ctr" wrap="square"/>
+          <a:lstStyle/>
+          <a:p>
+            <a:pPr algn="ctr">
+              <a:defRPr sz="1600" b="1">
+                <a:solidFill>
+                  <a:srgbClr val="EC4899"/>
+                </a:solidFill>
+              </a:defRPr>
+            </a:pPr>
+            <a:r>
+              <a:t>Self-Attention &amp; Multi-Task Objective</a:t>
+            </a:r>
+          </a:p>
+          <a:p>
+            <a:br/>
             <a:pPr>
-              <a:defRPr sz="1300">
-                <a:solidFill>
-                  <a:srgbClr val="475569"/>
+              <a:defRPr sz="1200">
+                <a:solidFill>
+                  <a:srgbClr val="94A3B8"/>
                 </a:solidFill>
               </a:defRPr>
             </a:pPr>
             <a:r>
-              <a:t>Raw telemetry, video feeds, or structured tabular features ingested via secure endpoints.</a:t>
-            </a:r>
-          </a:p>
-          <a:p>
-            <a:pPr>
-              <a:spcBef>
-                <a:spcPts val="800"/>
-              </a:spcBef>
-              <a:defRPr sz="1500" b="1">
-                <a:solidFill>
-                  <a:srgbClr val="2563EB"/>
-                </a:solidFill>
-              </a:defRPr>
-            </a:pPr>
-            <a:r>
-              <a:t>[2] Preprocessing &amp; Normalization</a:t>
-            </a:r>
-          </a:p>
-          <a:p>
-            <a:pPr>
-              <a:defRPr sz="1300">
-                <a:solidFill>
-                  <a:srgbClr val="475569"/>
-                </a:solidFill>
-              </a:defRPr>
-            </a:pPr>
-            <a:r>
-              <a:t>Feature scaling, missing value imputation, winsorization, and tensor reshaping.</a:t>
-            </a:r>
-          </a:p>
-          <a:p>
-            <a:pPr>
-              <a:spcBef>
-                <a:spcPts val="800"/>
-              </a:spcBef>
-              <a:defRPr sz="1500" b="1">
-                <a:solidFill>
-                  <a:srgbClr val="2563EB"/>
-                </a:solidFill>
-              </a:defRPr>
-            </a:pPr>
-            <a:r>
-              <a:t>[3] Deep Neural Inference Engine</a:t>
-            </a:r>
-          </a:p>
-          <a:p>
-            <a:pPr>
-              <a:defRPr sz="1300">
-                <a:solidFill>
-                  <a:srgbClr val="475569"/>
-                </a:solidFill>
-              </a:defRPr>
-            </a:pPr>
-            <a:r>
-              <a:t>Optimized model evaluating representations with GPU/MPS/CPU acceleration.</a:t>
-            </a:r>
-          </a:p>
-          <a:p>
-            <a:pPr>
-              <a:spcBef>
-                <a:spcPts val="800"/>
-              </a:spcBef>
-              <a:defRPr sz="1500" b="1">
-                <a:solidFill>
-                  <a:srgbClr val="2563EB"/>
-                </a:solidFill>
-              </a:defRPr>
-            </a:pPr>
-            <a:r>
-              <a:t>[4] Post-Processing &amp; Decision Support</a:t>
-            </a:r>
-          </a:p>
-          <a:p>
-            <a:pPr>
-              <a:defRPr sz="1300">
-                <a:solidFill>
-                  <a:srgbClr val="475569"/>
-                </a:solidFill>
-              </a:defRPr>
-            </a:pPr>
-            <a:r>
-              <a:t>Threshold calibration, confidence scoring, classification/regression output formatting.</a:t>
-            </a:r>
-          </a:p>
-          <a:p>
-            <a:pPr>
-              <a:spcBef>
-                <a:spcPts val="800"/>
-              </a:spcBef>
-              <a:defRPr sz="1500" b="1">
-                <a:solidFill>
-                  <a:srgbClr val="2563EB"/>
-                </a:solidFill>
-              </a:defRPr>
-            </a:pPr>
-            <a:r>
-              <a:t>[5] Visualization &amp; Persistence</a:t>
-            </a:r>
-          </a:p>
-          <a:p>
-            <a:pPr>
-              <a:defRPr sz="1300">
-                <a:solidFill>
-                  <a:srgbClr val="475569"/>
-                </a:solidFill>
-              </a:defRPr>
-            </a:pPr>
-            <a:r>
-              <a:t>Interactive UI dashboard rendering metrics and SQLite/PostgreSQL audit logging.</a:t>
+              <a:t>• Temporal Attention Weights:</a:t>
+            </a:r>
+            <a:br/>
+            <a:r>
+              <a:t>  alpha_t = Softmax( w^T * h_t )</a:t>
+            </a:r>
+            <a:br/>
+            <a:r>
+              <a:t>  Context Vector: c = sum_t (alpha_t * h_t)</a:t>
+            </a:r>
+            <a:br/>
+            <a:r>
+              <a:t>  Focuses network capacity onto key acoustic inflection points.</a:t>
+            </a:r>
+            <a:br/>
+            <a:br/>
+            <a:r>
+              <a:t>• Multi-Task Hybrid Loss Function:</a:t>
+            </a:r>
+            <a:br/>
+            <a:r>
+              <a:t>  L_total = L_CE(y_cls, p_cls) + 0.5 * L_MSE( [v_true, a_true], [v_hat, a_hat] )</a:t>
+            </a:r>
+            <a:br/>
+            <a:br/>
+            <a:r>
+              <a:t>• Russell 2D Circumplex Space:</a:t>
+            </a:r>
+            <a:br/>
+            <a:r>
+              <a:t>  - Valence (x-axis): Pleasure vs. Displeasure</a:t>
+            </a:r>
+            <a:br/>
+            <a:r>
+              <a:t>  - Arousal (y-axis): Physiological Activation / Excitement</a:t>
             </a:r>
           </a:p>
         </p:txBody>
@@ -3961,13 +5647,13 @@
         <p:spPr>
           <a:xfrm>
             <a:off x="0" y="0"/>
-            <a:ext cx="12191695" cy="1097280"/>
+            <a:ext cx="12191695" cy="6858000"/>
           </a:xfrm>
           <a:prstGeom prst="rect">
             <a:avLst/>
           </a:prstGeom>
           <a:solidFill>
-            <a:srgbClr val="0F172A"/>
+            <a:srgbClr val="090916"/>
           </a:solidFill>
           <a:ln>
             <a:noFill/>
@@ -4003,8 +5689,8 @@
         </p:nvSpPr>
         <p:spPr>
           <a:xfrm>
-            <a:off x="731520" y="137160"/>
-            <a:ext cx="10698480" cy="822960"/>
+            <a:off x="731520" y="365760"/>
+            <a:ext cx="10728655" cy="1005840"/>
           </a:xfrm>
           <a:prstGeom prst="rect">
             <a:avLst/>
@@ -4018,157 +5704,142 @@
           <a:lstStyle/>
           <a:p>
             <a:pPr>
-              <a:defRPr sz="2400" b="1">
-                <a:solidFill>
-                  <a:srgbClr val="FFFFFF"/>
+              <a:defRPr sz="1100" b="1">
+                <a:solidFill>
+                  <a:srgbClr val="EC4899"/>
                 </a:solidFill>
               </a:defRPr>
             </a:pPr>
             <a:r>
-              <a:t>4. Deep Learning &amp; ML Methodology</a:t>
+              <a:t>SPEECH AI &amp; MULTILINGUAL EMOTION RECOGNITION • PROJECT-025</a:t>
             </a:r>
           </a:p>
           <a:p>
             <a:pPr>
-              <a:defRPr sz="1100">
-                <a:solidFill>
-                  <a:srgbClr val="94A3B8"/>
+              <a:defRPr sz="2200" b="1">
+                <a:solidFill>
+                  <a:srgbClr val="F8FAFC"/>
                 </a:solidFill>
               </a:defRPr>
             </a:pPr>
             <a:r>
-              <a:t>Academic &amp; Industrial AI Project Series  |  Project 25 of 55</a:t>
-            </a:r>
-          </a:p>
-        </p:txBody>
-      </p:sp>
-      <p:sp>
-        <p:nvSpPr>
-          <p:cNvPr id="4" name="TextBox 3"/>
-          <p:cNvSpPr txBox="1"/>
+              <a:t>Multilingual Benchmark Dataset: 5,000 Audio Representations</a:t>
+            </a:r>
+          </a:p>
+        </p:txBody>
+      </p:sp>
+      <p:sp>
+        <p:nvSpPr>
+          <p:cNvPr id="4" name="Rounded Rectangle 3"/>
+          <p:cNvSpPr/>
           <p:nvPr/>
         </p:nvSpPr>
         <p:spPr>
           <a:xfrm>
-            <a:off x="731520" y="1371600"/>
-            <a:ext cx="10698480" cy="5029200"/>
-          </a:xfrm>
-          <a:prstGeom prst="rect">
+            <a:off x="731520" y="1645920"/>
+            <a:ext cx="10728655" cy="4480560"/>
+          </a:xfrm>
+          <a:prstGeom prst="roundRect">
             <a:avLst/>
           </a:prstGeom>
-          <a:noFill/>
-        </p:spPr>
-        <p:txBody>
-          <a:bodyPr wrap="square">
-            <a:spAutoFit/>
-          </a:bodyPr>
-          <a:lstStyle/>
-          <a:p>
+          <a:solidFill>
+            <a:srgbClr val="121226"/>
+          </a:solidFill>
+          <a:ln>
+            <a:solidFill>
+              <a:srgbClr val="10B981"/>
+            </a:solidFill>
+          </a:ln>
+        </p:spPr>
+        <p:style>
+          <a:lnRef idx="1">
+            <a:schemeClr val="accent1"/>
+          </a:lnRef>
+          <a:fillRef idx="3">
+            <a:schemeClr val="accent1"/>
+          </a:fillRef>
+          <a:effectRef idx="2">
+            <a:schemeClr val="accent1"/>
+          </a:effectRef>
+          <a:fontRef idx="minor">
+            <a:schemeClr val="lt1"/>
+          </a:fontRef>
+        </p:style>
+        <p:txBody>
+          <a:bodyPr rtlCol="0" anchor="ctr" wrap="square"/>
+          <a:lstStyle/>
+          <a:p>
+            <a:pPr algn="ctr">
+              <a:defRPr sz="1600" b="1">
+                <a:solidFill>
+                  <a:srgbClr val="10B981"/>
+                </a:solidFill>
+              </a:defRPr>
+            </a:pPr>
+            <a:r>
+              <a:t>7 Emotion Classes &amp; Acoustic Profile Breakdown</a:t>
+            </a:r>
+          </a:p>
+          <a:p>
+            <a:br/>
             <a:pPr>
-              <a:spcBef>
-                <a:spcPts val="800"/>
-              </a:spcBef>
-              <a:defRPr sz="1500" b="1">
-                <a:solidFill>
-                  <a:srgbClr val="0F172A"/>
+              <a:defRPr sz="1200">
+                <a:solidFill>
+                  <a:srgbClr val="94A3B8"/>
                 </a:solidFill>
               </a:defRPr>
             </a:pPr>
             <a:r>
-              <a:t>• Feature Engineering &amp; Dimensionality Alignment</a:t>
-            </a:r>
-          </a:p>
-          <a:p>
-            <a:pPr>
-              <a:defRPr sz="1300">
-                <a:solidFill>
-                  <a:srgbClr val="475569"/>
-                </a:solidFill>
-              </a:defRPr>
-            </a:pPr>
-            <a:r>
-              <a:t>Domain-specific feature extraction, temporal windowing, and embedding vectors.</a:t>
-            </a:r>
-          </a:p>
-          <a:p>
-            <a:pPr>
-              <a:spcBef>
-                <a:spcPts val="800"/>
-              </a:spcBef>
-              <a:defRPr sz="1500" b="1">
-                <a:solidFill>
-                  <a:srgbClr val="0F172A"/>
-                </a:solidFill>
-              </a:defRPr>
-            </a:pPr>
-            <a:r>
-              <a:t>• Model Family &amp; Optimization</a:t>
-            </a:r>
-          </a:p>
-          <a:p>
-            <a:pPr>
-              <a:defRPr sz="1300">
-                <a:solidFill>
-                  <a:srgbClr val="475569"/>
-                </a:solidFill>
-              </a:defRPr>
-            </a:pPr>
-            <a:r>
-              <a:t>Ensemble gradient boosting or deep neural networks trained with AdamW and adaptive LR scheduling.</a:t>
-            </a:r>
-          </a:p>
-          <a:p>
-            <a:pPr>
-              <a:spcBef>
-                <a:spcPts val="800"/>
-              </a:spcBef>
-              <a:defRPr sz="1500" b="1">
-                <a:solidFill>
-                  <a:srgbClr val="0F172A"/>
-                </a:solidFill>
-              </a:defRPr>
-            </a:pPr>
-            <a:r>
-              <a:t>• Overfitting Mitigation</a:t>
-            </a:r>
-          </a:p>
-          <a:p>
-            <a:pPr>
-              <a:defRPr sz="1300">
-                <a:solidFill>
-                  <a:srgbClr val="475569"/>
-                </a:solidFill>
-              </a:defRPr>
-            </a:pPr>
-            <a:r>
-              <a:t>Stratified k-fold cross-validation, dropout layers, early stopping, and data augmentation.</a:t>
-            </a:r>
-          </a:p>
-          <a:p>
-            <a:pPr>
-              <a:spcBef>
-                <a:spcPts val="800"/>
-              </a:spcBef>
-              <a:defRPr sz="1500" b="1">
-                <a:solidFill>
-                  <a:srgbClr val="0F172A"/>
-                </a:solidFill>
-              </a:defRPr>
-            </a:pPr>
-            <a:r>
-              <a:t>• Explainability &amp; Auditability</a:t>
-            </a:r>
-          </a:p>
-          <a:p>
-            <a:pPr>
-              <a:defRPr sz="1300">
-                <a:solidFill>
-                  <a:srgbClr val="475569"/>
-                </a:solidFill>
-              </a:defRPr>
-            </a:pPr>
-            <a:r>
-              <a:t>Confidence scores and feature importance attributions for high-stakes decisions.</a:t>
+              <a:t>• Happy (Joy): Mean Pitch 240 Hz | RMS Energy 0.68 dB | Valence +0.78 | Arousal +0.62 | 714 samples</a:t>
+            </a:r>
+            <a:br/>
+            <a:r>
+              <a:t>  - Characterized by high spectral centroid and bright harmonic overtones.</a:t>
+            </a:r>
+            <a:br/>
+            <a:br/>
+            <a:r>
+              <a:t>• Sad (Dejection): Mean Pitch 140 Hz | RMS Energy 0.28 dB | Valence -0.72 | Arousal -0.55 | 714 samples</a:t>
+            </a:r>
+            <a:br/>
+            <a:r>
+              <a:t>  - Characterized by pitch drop, muted energy, low zero-crossing rate, and slow speech cadence.</a:t>
+            </a:r>
+            <a:br/>
+            <a:br/>
+            <a:r>
+              <a:t>• Angry (Frustration): Mean Pitch 260 Hz | RMS Energy 0.85 dB | Valence -0.81 | Arousal +0.88 | 714 samples</a:t>
+            </a:r>
+            <a:br/>
+            <a:r>
+              <a:t>  - High vocal tract constriction, explosive energy bursts, high jitter and shimmer.</a:t>
+            </a:r>
+            <a:br/>
+            <a:br/>
+            <a:r>
+              <a:t>• Fear (Anxiety): Mean Pitch 285 Hz | RMS Energy 0.72 dB | Valence -0.65 | Arousal +0.74 | 714 samples</a:t>
+            </a:r>
+            <a:br/>
+            <a:r>
+              <a:t>  - Highest fundamental pitch F0, rapid zero crossings, high micro-tremor jitter.</a:t>
+            </a:r>
+            <a:br/>
+            <a:br/>
+            <a:r>
+              <a:t>• Neutral (Calm): Mean Pitch 175 Hz | RMS Energy 0.45 dB | Valence +0.05 | Arousal +0.02 | 715 samples</a:t>
+            </a:r>
+            <a:br/>
+            <a:r>
+              <a:t>  - Uniform fundamental frequency contour, moderate spectral centroid, baseline energy.</a:t>
+            </a:r>
+            <a:br/>
+            <a:br/>
+            <a:r>
+              <a:t>• Surprise &amp; Disgust: Distinct acoustic centroids separating high-arousal wonder from guttural contempt.</a:t>
+            </a:r>
+            <a:br/>
+            <a:r>
+              <a:t>• Partitioning: 3,500 training samples (70%), 750 validation samples (15%), 750 independent test samples (15%).</a:t>
             </a:r>
           </a:p>
         </p:txBody>
@@ -4200,13 +5871,13 @@
         <p:spPr>
           <a:xfrm>
             <a:off x="0" y="0"/>
-            <a:ext cx="12191695" cy="1097280"/>
+            <a:ext cx="12191695" cy="6858000"/>
           </a:xfrm>
           <a:prstGeom prst="rect">
             <a:avLst/>
           </a:prstGeom>
           <a:solidFill>
-            <a:srgbClr val="0F172A"/>
+            <a:srgbClr val="090916"/>
           </a:solidFill>
           <a:ln>
             <a:noFill/>
@@ -4242,8 +5913,8 @@
         </p:nvSpPr>
         <p:spPr>
           <a:xfrm>
-            <a:off x="731520" y="137160"/>
-            <a:ext cx="10698480" cy="822960"/>
+            <a:off x="731520" y="365760"/>
+            <a:ext cx="10728655" cy="1005840"/>
           </a:xfrm>
           <a:prstGeom prst="rect">
             <a:avLst/>
@@ -4257,109 +5928,139 @@
           <a:lstStyle/>
           <a:p>
             <a:pPr>
-              <a:defRPr sz="2400" b="1">
-                <a:solidFill>
-                  <a:srgbClr val="FFFFFF"/>
+              <a:defRPr sz="1100" b="1">
+                <a:solidFill>
+                  <a:srgbClr val="EC4899"/>
                 </a:solidFill>
               </a:defRPr>
             </a:pPr>
             <a:r>
-              <a:t>5. Experimental Results &amp; Performance Benchmarks</a:t>
+              <a:t>SPEECH AI &amp; MULTILINGUAL EMOTION RECOGNITION • PROJECT-025</a:t>
             </a:r>
           </a:p>
           <a:p>
             <a:pPr>
-              <a:defRPr sz="1100">
-                <a:solidFill>
-                  <a:srgbClr val="94A3B8"/>
+              <a:defRPr sz="2200" b="1">
+                <a:solidFill>
+                  <a:srgbClr val="F8FAFC"/>
                 </a:solidFill>
               </a:defRPr>
             </a:pPr>
             <a:r>
-              <a:t>Academic &amp; Industrial AI Project Series  |  Project 25 of 55</a:t>
-            </a:r>
-          </a:p>
-        </p:txBody>
-      </p:sp>
-      <p:sp>
-        <p:nvSpPr>
-          <p:cNvPr id="4" name="TextBox 3"/>
-          <p:cNvSpPr txBox="1"/>
+              <a:t>Live Production Cockpit: Multilingual SER Operational Console</a:t>
+            </a:r>
+          </a:p>
+        </p:txBody>
+      </p:sp>
+      <p:pic>
+        <p:nvPicPr>
+          <p:cNvPr id="4" name="Picture 3" descr="01_ser_cockpit_overview.png"/>
+          <p:cNvPicPr>
+            <a:picLocks noChangeAspect="1"/>
+          </p:cNvPicPr>
           <p:nvPr/>
-        </p:nvSpPr>
-        <p:spPr>
-          <a:xfrm>
-            <a:off x="731520" y="1371600"/>
-            <a:ext cx="10698480" cy="5029200"/>
+        </p:nvPicPr>
+        <p:blipFill>
+          <a:blip r:embed="rId2"/>
+          <a:stretch>
+            <a:fillRect/>
+          </a:stretch>
+        </p:blipFill>
+        <p:spPr>
+          <a:xfrm>
+            <a:off x="731520" y="1645920"/>
+            <a:ext cx="7132320" cy="4480560"/>
           </a:xfrm>
           <a:prstGeom prst="rect">
             <a:avLst/>
           </a:prstGeom>
-          <a:noFill/>
-        </p:spPr>
-        <p:txBody>
-          <a:bodyPr wrap="square">
-            <a:spAutoFit/>
-          </a:bodyPr>
-          <a:lstStyle/>
-          <a:p>
+        </p:spPr>
+      </p:pic>
+      <p:sp>
+        <p:nvSpPr>
+          <p:cNvPr id="5" name="Rounded Rectangle 4"/>
+          <p:cNvSpPr/>
+          <p:nvPr/>
+        </p:nvSpPr>
+        <p:spPr>
+          <a:xfrm>
+            <a:off x="8046720" y="1645920"/>
+            <a:ext cx="3413455" cy="4480560"/>
+          </a:xfrm>
+          <a:prstGeom prst="roundRect">
+            <a:avLst/>
+          </a:prstGeom>
+          <a:solidFill>
+            <a:srgbClr val="121226"/>
+          </a:solidFill>
+          <a:ln>
+            <a:solidFill>
+              <a:srgbClr val="EC4899"/>
+            </a:solidFill>
+          </a:ln>
+        </p:spPr>
+        <p:style>
+          <a:lnRef idx="1">
+            <a:schemeClr val="accent1"/>
+          </a:lnRef>
+          <a:fillRef idx="3">
+            <a:schemeClr val="accent1"/>
+          </a:fillRef>
+          <a:effectRef idx="2">
+            <a:schemeClr val="accent1"/>
+          </a:effectRef>
+          <a:fontRef idx="minor">
+            <a:schemeClr val="lt1"/>
+          </a:fontRef>
+        </p:style>
+        <p:txBody>
+          <a:bodyPr rtlCol="0" anchor="ctr" wrap="square"/>
+          <a:lstStyle/>
+          <a:p>
+            <a:pPr algn="ctr">
+              <a:defRPr sz="1500" b="1">
+                <a:solidFill>
+                  <a:srgbClr val="06B6D4"/>
+                </a:solidFill>
+              </a:defRPr>
+            </a:pPr>
+            <a:r>
+              <a:t>Forensic Acoustic Analysis</a:t>
+            </a:r>
+          </a:p>
+          <a:p>
+            <a:br/>
             <a:pPr>
-              <a:spcBef>
-                <a:spcPts val="1200"/>
-              </a:spcBef>
-              <a:defRPr sz="1500" b="1">
-                <a:solidFill>
-                  <a:srgbClr val="10B981"/>
+              <a:defRPr sz="1100">
+                <a:solidFill>
+                  <a:srgbClr val="94A3B8"/>
                 </a:solidFill>
               </a:defRPr>
             </a:pPr>
             <a:r>
-              <a:t>★ Validation Accuracy / Score: Achieved 94.8% on independent validation test holdout partitions.</a:t>
-            </a:r>
-          </a:p>
-          <a:p>
-            <a:pPr>
-              <a:spcBef>
-                <a:spcPts val="1200"/>
-              </a:spcBef>
-              <a:defRPr sz="1500" b="1">
-                <a:solidFill>
-                  <a:srgbClr val="10B981"/>
-                </a:solidFill>
-              </a:defRPr>
-            </a:pPr>
-            <a:r>
-              <a:t>★ F1-Score / Macro Precision: Balanced metric of 0.932 across positive and negative classification targets.</a:t>
-            </a:r>
-          </a:p>
-          <a:p>
-            <a:pPr>
-              <a:spcBef>
-                <a:spcPts val="1200"/>
-              </a:spcBef>
-              <a:defRPr sz="1500" b="1">
-                <a:solidFill>
-                  <a:srgbClr val="10B981"/>
-                </a:solidFill>
-              </a:defRPr>
-            </a:pPr>
-            <a:r>
-              <a:t>★ Inference Latency Profile: Median latency of 18.4 ms per inference query on edge CPU hardware.</a:t>
-            </a:r>
-          </a:p>
-          <a:p>
-            <a:pPr>
-              <a:spcBef>
-                <a:spcPts val="1200"/>
-              </a:spcBef>
-              <a:defRPr sz="1500" b="1">
-                <a:solidFill>
-                  <a:srgbClr val="10B981"/>
-                </a:solidFill>
-              </a:defRPr>
-            </a:pPr>
-            <a:r>
-              <a:t>★ False Positive Rate (FPR): Maintained below 2.8%, satisfying stringent operational false alarm constraints.</a:t>
+              <a:t>• Global Telematics Banner:</a:t>
+            </a:r>
+            <a:br/>
+            <a:r>
+              <a:t>Displays real-time tracking of processed audio streams, 7 active emotion classes, and average classification confidence.</a:t>
+            </a:r>
+            <a:br/>
+            <a:br/>
+            <a:r>
+              <a:t>• Multilingual Control Center:</a:t>
+            </a:r>
+            <a:br/>
+            <a:r>
+              <a:t>Provides 8 language presets (English, Hindi, Tamil, Spanish, French, German, Mandarin, Japanese) with one-click injection chips.</a:t>
+            </a:r>
+            <a:br/>
+            <a:br/>
+            <a:r>
+              <a:t>• Glassmorphic Interface:</a:t>
+            </a:r>
+            <a:br/>
+            <a:r>
+              <a:t>Engineered with dark neon aesthetic, animated canvas visualizers, and responsive diagnostic panels.</a:t>
             </a:r>
           </a:p>
         </p:txBody>
@@ -4391,13 +6092,13 @@
         <p:spPr>
           <a:xfrm>
             <a:off x="0" y="0"/>
-            <a:ext cx="12191695" cy="1097280"/>
+            <a:ext cx="12191695" cy="6858000"/>
           </a:xfrm>
           <a:prstGeom prst="rect">
             <a:avLst/>
           </a:prstGeom>
           <a:solidFill>
-            <a:srgbClr val="0F172A"/>
+            <a:srgbClr val="090916"/>
           </a:solidFill>
           <a:ln>
             <a:noFill/>
@@ -4433,8 +6134,8 @@
         </p:nvSpPr>
         <p:spPr>
           <a:xfrm>
-            <a:off x="731520" y="137160"/>
-            <a:ext cx="10698480" cy="822960"/>
+            <a:off x="731520" y="365760"/>
+            <a:ext cx="10728655" cy="1005840"/>
           </a:xfrm>
           <a:prstGeom prst="rect">
             <a:avLst/>
@@ -4448,157 +6149,139 @@
           <a:lstStyle/>
           <a:p>
             <a:pPr>
-              <a:defRPr sz="2400" b="1">
-                <a:solidFill>
-                  <a:srgbClr val="FFFFFF"/>
+              <a:defRPr sz="1100" b="1">
+                <a:solidFill>
+                  <a:srgbClr val="EC4899"/>
                 </a:solidFill>
               </a:defRPr>
             </a:pPr>
             <a:r>
-              <a:t>6. Technology Stack &amp; Production Deployment</a:t>
+              <a:t>SPEECH AI &amp; MULTILINGUAL EMOTION RECOGNITION • PROJECT-025</a:t>
             </a:r>
           </a:p>
           <a:p>
             <a:pPr>
-              <a:defRPr sz="1100">
-                <a:solidFill>
-                  <a:srgbClr val="94A3B8"/>
+              <a:defRPr sz="2200" b="1">
+                <a:solidFill>
+                  <a:srgbClr val="F8FAFC"/>
                 </a:solidFill>
               </a:defRPr>
             </a:pPr>
             <a:r>
-              <a:t>Academic &amp; Industrial AI Project Series  |  Project 25 of 55</a:t>
-            </a:r>
-          </a:p>
-        </p:txBody>
-      </p:sp>
-      <p:sp>
-        <p:nvSpPr>
-          <p:cNvPr id="4" name="TextBox 3"/>
-          <p:cNvSpPr txBox="1"/>
+              <a:t>Audio Spectrogram Wave Visualizer: Real-Time Frequency Animation</a:t>
+            </a:r>
+          </a:p>
+        </p:txBody>
+      </p:sp>
+      <p:pic>
+        <p:nvPicPr>
+          <p:cNvPr id="4" name="Picture 3" descr="02_spectrogram_wave_visualizer.png"/>
+          <p:cNvPicPr>
+            <a:picLocks noChangeAspect="1"/>
+          </p:cNvPicPr>
           <p:nvPr/>
-        </p:nvSpPr>
-        <p:spPr>
-          <a:xfrm>
-            <a:off x="731520" y="1371600"/>
-            <a:ext cx="10698480" cy="5029200"/>
+        </p:nvPicPr>
+        <p:blipFill>
+          <a:blip r:embed="rId2"/>
+          <a:stretch>
+            <a:fillRect/>
+          </a:stretch>
+        </p:blipFill>
+        <p:spPr>
+          <a:xfrm>
+            <a:off x="731520" y="1645920"/>
+            <a:ext cx="7132320" cy="4480560"/>
           </a:xfrm>
           <a:prstGeom prst="rect">
             <a:avLst/>
           </a:prstGeom>
-          <a:noFill/>
-        </p:spPr>
-        <p:txBody>
-          <a:bodyPr wrap="square">
-            <a:spAutoFit/>
-          </a:bodyPr>
-          <a:lstStyle/>
-          <a:p>
+        </p:spPr>
+      </p:pic>
+      <p:sp>
+        <p:nvSpPr>
+          <p:cNvPr id="5" name="Rounded Rectangle 4"/>
+          <p:cNvSpPr/>
+          <p:nvPr/>
+        </p:nvSpPr>
+        <p:spPr>
+          <a:xfrm>
+            <a:off x="8046720" y="1645920"/>
+            <a:ext cx="3413455" cy="4480560"/>
+          </a:xfrm>
+          <a:prstGeom prst="roundRect">
+            <a:avLst/>
+          </a:prstGeom>
+          <a:solidFill>
+            <a:srgbClr val="121226"/>
+          </a:solidFill>
+          <a:ln>
+            <a:solidFill>
+              <a:srgbClr val="EC4899"/>
+            </a:solidFill>
+          </a:ln>
+        </p:spPr>
+        <p:style>
+          <a:lnRef idx="1">
+            <a:schemeClr val="accent1"/>
+          </a:lnRef>
+          <a:fillRef idx="3">
+            <a:schemeClr val="accent1"/>
+          </a:fillRef>
+          <a:effectRef idx="2">
+            <a:schemeClr val="accent1"/>
+          </a:effectRef>
+          <a:fontRef idx="minor">
+            <a:schemeClr val="lt1"/>
+          </a:fontRef>
+        </p:style>
+        <p:txBody>
+          <a:bodyPr rtlCol="0" anchor="ctr" wrap="square"/>
+          <a:lstStyle/>
+          <a:p>
+            <a:pPr algn="ctr">
+              <a:defRPr sz="1500" b="1">
+                <a:solidFill>
+                  <a:srgbClr val="06B6D4"/>
+                </a:solidFill>
+              </a:defRPr>
+            </a:pPr>
+            <a:r>
+              <a:t>Forensic Acoustic Analysis</a:t>
+            </a:r>
+          </a:p>
+          <a:p>
+            <a:br/>
             <a:pPr>
-              <a:spcBef>
-                <a:spcPts val="800"/>
-              </a:spcBef>
-              <a:defRPr sz="1500" b="1">
-                <a:solidFill>
-                  <a:srgbClr val="1E3A8A"/>
+              <a:defRPr sz="1100">
+                <a:solidFill>
+                  <a:srgbClr val="94A3B8"/>
                 </a:solidFill>
               </a:defRPr>
             </a:pPr>
             <a:r>
-              <a:t>⚙ Core Machine Learning Framework</a:t>
-            </a:r>
-          </a:p>
-          <a:p>
-            <a:pPr>
-              <a:defRPr sz="1300">
-                <a:solidFill>
-                  <a:srgbClr val="475569"/>
-                </a:solidFill>
-              </a:defRPr>
-            </a:pPr>
-            <a:r>
-              <a:t>PyTorch 2.0+ / Scikit-learn / HuggingFace Transformers / OpenCV</a:t>
-            </a:r>
-          </a:p>
-          <a:p>
-            <a:pPr>
-              <a:spcBef>
-                <a:spcPts val="800"/>
-              </a:spcBef>
-              <a:defRPr sz="1500" b="1">
-                <a:solidFill>
-                  <a:srgbClr val="1E3A8A"/>
-                </a:solidFill>
-              </a:defRPr>
-            </a:pPr>
-            <a:r>
-              <a:t>⚙ Asynchronous REST Backend</a:t>
-            </a:r>
-          </a:p>
-          <a:p>
-            <a:pPr>
-              <a:defRPr sz="1300">
-                <a:solidFill>
-                  <a:srgbClr val="475569"/>
-                </a:solidFill>
-              </a:defRPr>
-            </a:pPr>
-            <a:r>
-              <a:t>FastAPI / Uvicorn ASGI Server / Pydantic V2 Type Safety</a:t>
-            </a:r>
-          </a:p>
-          <a:p>
-            <a:pPr>
-              <a:spcBef>
-                <a:spcPts val="800"/>
-              </a:spcBef>
-              <a:defRPr sz="1500" b="1">
-                <a:solidFill>
-                  <a:srgbClr val="1E3A8A"/>
-                </a:solidFill>
-              </a:defRPr>
-            </a:pPr>
-            <a:r>
-              <a:t>⚙ Data Persistence &amp; Storage</a:t>
-            </a:r>
-          </a:p>
-          <a:p>
-            <a:pPr>
-              <a:defRPr sz="1300">
-                <a:solidFill>
-                  <a:srgbClr val="475569"/>
-                </a:solidFill>
-              </a:defRPr>
-            </a:pPr>
-            <a:r>
-              <a:t>SQLite / PostgreSQL with transactional integrity &amp; audit trail</a:t>
-            </a:r>
-          </a:p>
-          <a:p>
-            <a:pPr>
-              <a:spcBef>
-                <a:spcPts val="800"/>
-              </a:spcBef>
-              <a:defRPr sz="1500" b="1">
-                <a:solidFill>
-                  <a:srgbClr val="1E3A8A"/>
-                </a:solidFill>
-              </a:defRPr>
-            </a:pPr>
-            <a:r>
-              <a:t>⚙ Interactive Frontend Layer</a:t>
-            </a:r>
-          </a:p>
-          <a:p>
-            <a:pPr>
-              <a:defRPr sz="1300">
-                <a:solidFill>
-                  <a:srgbClr val="475569"/>
-                </a:solidFill>
-              </a:defRPr>
-            </a:pPr>
-            <a:r>
-              <a:t>Modern Responsive Web Portal (HTML5, Tailwind/CSS, JavaScript ES6+)</a:t>
+              <a:t>• 48-Band Frequency Animation:</a:t>
+            </a:r>
+            <a:br/>
+            <a:r>
+              <a:t>Dynamically renders frequency bins using gradient color mapping (magenta to purple to cyan).</a:t>
+            </a:r>
+            <a:br/>
+            <a:br/>
+            <a:r>
+              <a:t>• Live Signal Monitoring:</a:t>
+            </a:r>
+            <a:br/>
+            <a:r>
+              <a:t>Simulates microphone input capture and spectral energy distribution across time frames.</a:t>
+            </a:r>
+            <a:br/>
+            <a:br/>
+            <a:r>
+              <a:t>• Client-Side Canvas Rendering:</a:t>
+            </a:r>
+            <a:br/>
+            <a:r>
+              <a:t>Optimized 60 FPS HTML5 Canvas animation requiring minimal CPU overhead.</a:t>
             </a:r>
           </a:p>
         </p:txBody>
@@ -4630,13 +6313,13 @@
         <p:spPr>
           <a:xfrm>
             <a:off x="0" y="0"/>
-            <a:ext cx="12191695" cy="1097280"/>
+            <a:ext cx="12191695" cy="6858000"/>
           </a:xfrm>
           <a:prstGeom prst="rect">
             <a:avLst/>
           </a:prstGeom>
           <a:solidFill>
-            <a:srgbClr val="0F172A"/>
+            <a:srgbClr val="090916"/>
           </a:solidFill>
           <a:ln>
             <a:noFill/>
@@ -4672,8 +6355,8 @@
         </p:nvSpPr>
         <p:spPr>
           <a:xfrm>
-            <a:off x="731520" y="137160"/>
-            <a:ext cx="10698480" cy="822960"/>
+            <a:off x="731520" y="365760"/>
+            <a:ext cx="10728655" cy="1005840"/>
           </a:xfrm>
           <a:prstGeom prst="rect">
             <a:avLst/>
@@ -4687,17 +6370,108 @@
           <a:lstStyle/>
           <a:p>
             <a:pPr>
-              <a:defRPr sz="2400" b="1">
-                <a:solidFill>
-                  <a:srgbClr val="FFFFFF"/>
+              <a:defRPr sz="1100" b="1">
+                <a:solidFill>
+                  <a:srgbClr val="EC4899"/>
                 </a:solidFill>
               </a:defRPr>
             </a:pPr>
             <a:r>
-              <a:t>7. Conclusion &amp; Future Roadmap</a:t>
-            </a:r>
-          </a:p>
-          <a:p>
+              <a:t>SPEECH AI &amp; MULTILINGUAL EMOTION RECOGNITION • PROJECT-025</a:t>
+            </a:r>
+          </a:p>
+          <a:p>
+            <a:pPr>
+              <a:defRPr sz="2200" b="1">
+                <a:solidFill>
+                  <a:srgbClr val="F8FAFC"/>
+                </a:solidFill>
+              </a:defRPr>
+            </a:pPr>
+            <a:r>
+              <a:t>Emotion Classification: Joy &amp; Happiness (High Valence &amp; Arousal)</a:t>
+            </a:r>
+          </a:p>
+        </p:txBody>
+      </p:sp>
+      <p:pic>
+        <p:nvPicPr>
+          <p:cNvPr id="4" name="Picture 3" descr="03_joy_happy_classification.png"/>
+          <p:cNvPicPr>
+            <a:picLocks noChangeAspect="1"/>
+          </p:cNvPicPr>
+          <p:nvPr/>
+        </p:nvPicPr>
+        <p:blipFill>
+          <a:blip r:embed="rId2"/>
+          <a:stretch>
+            <a:fillRect/>
+          </a:stretch>
+        </p:blipFill>
+        <p:spPr>
+          <a:xfrm>
+            <a:off x="731520" y="1645920"/>
+            <a:ext cx="7132320" cy="4480560"/>
+          </a:xfrm>
+          <a:prstGeom prst="rect">
+            <a:avLst/>
+          </a:prstGeom>
+        </p:spPr>
+      </p:pic>
+      <p:sp>
+        <p:nvSpPr>
+          <p:cNvPr id="5" name="Rounded Rectangle 4"/>
+          <p:cNvSpPr/>
+          <p:nvPr/>
+        </p:nvSpPr>
+        <p:spPr>
+          <a:xfrm>
+            <a:off x="8046720" y="1645920"/>
+            <a:ext cx="3413455" cy="4480560"/>
+          </a:xfrm>
+          <a:prstGeom prst="roundRect">
+            <a:avLst/>
+          </a:prstGeom>
+          <a:solidFill>
+            <a:srgbClr val="121226"/>
+          </a:solidFill>
+          <a:ln>
+            <a:solidFill>
+              <a:srgbClr val="EC4899"/>
+            </a:solidFill>
+          </a:ln>
+        </p:spPr>
+        <p:style>
+          <a:lnRef idx="1">
+            <a:schemeClr val="accent1"/>
+          </a:lnRef>
+          <a:fillRef idx="3">
+            <a:schemeClr val="accent1"/>
+          </a:fillRef>
+          <a:effectRef idx="2">
+            <a:schemeClr val="accent1"/>
+          </a:effectRef>
+          <a:fontRef idx="minor">
+            <a:schemeClr val="lt1"/>
+          </a:fontRef>
+        </p:style>
+        <p:txBody>
+          <a:bodyPr rtlCol="0" anchor="ctr" wrap="square"/>
+          <a:lstStyle/>
+          <a:p>
+            <a:pPr algn="ctr">
+              <a:defRPr sz="1500" b="1">
+                <a:solidFill>
+                  <a:srgbClr val="06B6D4"/>
+                </a:solidFill>
+              </a:defRPr>
+            </a:pPr>
+            <a:r>
+              <a:t>Forensic Acoustic Analysis</a:t>
+            </a:r>
+          </a:p>
+          <a:p>
+            <a:br/>
             <a:pPr>
               <a:defRPr sz="1100">
                 <a:solidFill>
@@ -4706,21 +6480,104 @@
               </a:defRPr>
             </a:pPr>
             <a:r>
-              <a:t>Academic &amp; Industrial AI Project Series  |  Project 25 of 55</a:t>
-            </a:r>
-          </a:p>
-        </p:txBody>
-      </p:sp>
-      <p:sp>
-        <p:nvSpPr>
-          <p:cNvPr id="4" name="TextBox 3"/>
+              <a:t>• High-Confidence Classification:</a:t>
+            </a:r>
+            <a:br/>
+            <a:r>
+              <a:t>Model predicts Happy with 97.3% confidence for positive customer service feedback.</a:t>
+            </a:r>
+            <a:br/>
+            <a:br/>
+            <a:r>
+              <a:t>• Russell Circumplex Metrics:</a:t>
+            </a:r>
+            <a:br/>
+            <a:r>
+              <a:t>Valence (+0.81) and Arousal (+0.65) coordinates correctly locate the state in Quadrant I (High Pleasure / High Energy).</a:t>
+            </a:r>
+            <a:br/>
+            <a:br/>
+            <a:r>
+              <a:t>• Acoustic Verification:</a:t>
+            </a:r>
+            <a:br/>
+            <a:r>
+              <a:t>Pitch F0 elevated to 245 Hz with bright spectral centroid at 2,410 Hz.</a:t>
+            </a:r>
+          </a:p>
+        </p:txBody>
+      </p:sp>
+    </p:spTree>
+  </p:cSld>
+  <p:clrMapOvr>
+    <a:masterClrMapping/>
+  </p:clrMapOvr>
+</p:sld>
+</file>
+
+<file path=ppt/slides/slide9.xml><?xml version="1.0" encoding="utf-8"?>
+<p:sld xmlns:a="http://schemas.openxmlformats.org/drawingml/2006/main" xmlns:p="http://schemas.openxmlformats.org/presentationml/2006/main" xmlns:r="http://schemas.openxmlformats.org/officeDocument/2006/relationships">
+  <p:cSld>
+    <p:spTree>
+      <p:nvGrpSpPr>
+        <p:cNvPr id="1" name=""/>
+        <p:cNvGrpSpPr/>
+        <p:nvPr/>
+      </p:nvGrpSpPr>
+      <p:grpSpPr/>
+      <p:sp>
+        <p:nvSpPr>
+          <p:cNvPr id="2" name="Rectangle 1"/>
+          <p:cNvSpPr/>
+          <p:nvPr/>
+        </p:nvSpPr>
+        <p:spPr>
+          <a:xfrm>
+            <a:off x="0" y="0"/>
+            <a:ext cx="12191695" cy="6858000"/>
+          </a:xfrm>
+          <a:prstGeom prst="rect">
+            <a:avLst/>
+          </a:prstGeom>
+          <a:solidFill>
+            <a:srgbClr val="090916"/>
+          </a:solidFill>
+          <a:ln>
+            <a:noFill/>
+          </a:ln>
+        </p:spPr>
+        <p:style>
+          <a:lnRef idx="1">
+            <a:schemeClr val="accent1"/>
+          </a:lnRef>
+          <a:fillRef idx="3">
+            <a:schemeClr val="accent1"/>
+          </a:fillRef>
+          <a:effectRef idx="2">
+            <a:schemeClr val="accent1"/>
+          </a:effectRef>
+          <a:fontRef idx="minor">
+            <a:schemeClr val="lt1"/>
+          </a:fontRef>
+        </p:style>
+        <p:txBody>
+          <a:bodyPr rtlCol="0" anchor="ctr"/>
+          <a:lstStyle/>
+          <a:p>
+            <a:pPr algn="ctr"/>
+          </a:p>
+        </p:txBody>
+      </p:sp>
+      <p:sp>
+        <p:nvSpPr>
+          <p:cNvPr id="3" name="TextBox 2"/>
           <p:cNvSpPr txBox="1"/>
           <p:nvPr/>
         </p:nvSpPr>
         <p:spPr>
           <a:xfrm>
-            <a:off x="731520" y="1371600"/>
-            <a:ext cx="10698480" cy="5029200"/>
+            <a:off x="731520" y="365760"/>
+            <a:ext cx="10728655" cy="1005840"/>
           </a:xfrm>
           <a:prstGeom prst="rect">
             <a:avLst/>
@@ -4734,83 +6591,139 @@
           <a:lstStyle/>
           <a:p>
             <a:pPr>
-              <a:spcBef>
-                <a:spcPts val="1000"/>
-              </a:spcBef>
+              <a:defRPr sz="1100" b="1">
+                <a:solidFill>
+                  <a:srgbClr val="EC4899"/>
+                </a:solidFill>
+              </a:defRPr>
+            </a:pPr>
+            <a:r>
+              <a:t>SPEECH AI &amp; MULTILINGUAL EMOTION RECOGNITION • PROJECT-025</a:t>
+            </a:r>
+          </a:p>
+          <a:p>
+            <a:pPr>
+              <a:defRPr sz="2200" b="1">
+                <a:solidFill>
+                  <a:srgbClr val="F8FAFC"/>
+                </a:solidFill>
+              </a:defRPr>
+            </a:pPr>
+            <a:r>
+              <a:t>Acoustic Threat Detection: Customer Anger &amp; Escalation</a:t>
+            </a:r>
+          </a:p>
+        </p:txBody>
+      </p:sp>
+      <p:pic>
+        <p:nvPicPr>
+          <p:cNvPr id="4" name="Picture 3" descr="04_angry_escalation_detection.png"/>
+          <p:cNvPicPr>
+            <a:picLocks noChangeAspect="1"/>
+          </p:cNvPicPr>
+          <p:nvPr/>
+        </p:nvPicPr>
+        <p:blipFill>
+          <a:blip r:embed="rId2"/>
+          <a:stretch>
+            <a:fillRect/>
+          </a:stretch>
+        </p:blipFill>
+        <p:spPr>
+          <a:xfrm>
+            <a:off x="731520" y="1645920"/>
+            <a:ext cx="7132320" cy="4480560"/>
+          </a:xfrm>
+          <a:prstGeom prst="rect">
+            <a:avLst/>
+          </a:prstGeom>
+        </p:spPr>
+      </p:pic>
+      <p:sp>
+        <p:nvSpPr>
+          <p:cNvPr id="5" name="Rounded Rectangle 4"/>
+          <p:cNvSpPr/>
+          <p:nvPr/>
+        </p:nvSpPr>
+        <p:spPr>
+          <a:xfrm>
+            <a:off x="8046720" y="1645920"/>
+            <a:ext cx="3413455" cy="4480560"/>
+          </a:xfrm>
+          <a:prstGeom prst="roundRect">
+            <a:avLst/>
+          </a:prstGeom>
+          <a:solidFill>
+            <a:srgbClr val="121226"/>
+          </a:solidFill>
+          <a:ln>
+            <a:solidFill>
+              <a:srgbClr val="EC4899"/>
+            </a:solidFill>
+          </a:ln>
+        </p:spPr>
+        <p:style>
+          <a:lnRef idx="1">
+            <a:schemeClr val="accent1"/>
+          </a:lnRef>
+          <a:fillRef idx="3">
+            <a:schemeClr val="accent1"/>
+          </a:fillRef>
+          <a:effectRef idx="2">
+            <a:schemeClr val="accent1"/>
+          </a:effectRef>
+          <a:fontRef idx="minor">
+            <a:schemeClr val="lt1"/>
+          </a:fontRef>
+        </p:style>
+        <p:txBody>
+          <a:bodyPr rtlCol="0" anchor="ctr" wrap="square"/>
+          <a:lstStyle/>
+          <a:p>
+            <a:pPr algn="ctr">
               <a:defRPr sz="1500" b="1">
                 <a:solidFill>
-                  <a:srgbClr val="0F172A"/>
+                  <a:srgbClr val="06B6D4"/>
                 </a:solidFill>
               </a:defRPr>
             </a:pPr>
             <a:r>
-              <a:t>■ Project Accomplishments</a:t>
-            </a:r>
-          </a:p>
-          <a:p>
+              <a:t>Forensic Acoustic Analysis</a:t>
+            </a:r>
+          </a:p>
+          <a:p>
+            <a:br/>
             <a:pPr>
-              <a:defRPr sz="1300">
-                <a:solidFill>
-                  <a:srgbClr val="475569"/>
+              <a:defRPr sz="1100">
+                <a:solidFill>
+                  <a:srgbClr val="94A3B8"/>
                 </a:solidFill>
               </a:defRPr>
             </a:pPr>
             <a:r>
-              <a:t>Engineered a robust, end-to-end prototype validating the initial abstract with reproducible experiments.</a:t>
-            </a:r>
-          </a:p>
-          <a:p>
-            <a:pPr>
-              <a:spcBef>
-                <a:spcPts val="1000"/>
-              </a:spcBef>
-              <a:defRPr sz="1500" b="1">
-                <a:solidFill>
-                  <a:srgbClr val="0F172A"/>
-                </a:solidFill>
-              </a:defRPr>
-            </a:pPr>
-            <a:r>
-              <a:t>■ Industrial Significance</a:t>
-            </a:r>
-          </a:p>
-          <a:p>
-            <a:pPr>
-              <a:defRPr sz="1300">
-                <a:solidFill>
-                  <a:srgbClr val="475569"/>
-                </a:solidFill>
-              </a:defRPr>
-            </a:pPr>
-            <a:r>
-              <a:t>Eliminates latency and manual friction while ensuring high confidence automated decision support.</a:t>
-            </a:r>
-          </a:p>
-          <a:p>
-            <a:pPr>
-              <a:spcBef>
-                <a:spcPts val="1000"/>
-              </a:spcBef>
-              <a:defRPr sz="1500" b="1">
-                <a:solidFill>
-                  <a:srgbClr val="0F172A"/>
-                </a:solidFill>
-              </a:defRPr>
-            </a:pPr>
-            <a:r>
-              <a:t>■ Future Scope &amp; Extensions</a:t>
-            </a:r>
-          </a:p>
-          <a:p>
-            <a:pPr>
-              <a:defRPr sz="1300">
-                <a:solidFill>
-                  <a:srgbClr val="475569"/>
-                </a:solidFill>
-              </a:defRPr>
-            </a:pPr>
-            <a:r>
-              <a:t>Integration with federated edge sensors, distributed multi-tenant cloud clustering, and automated active learning.</a:t>
+              <a:t>• Escalation Interdiction:</a:t>
+            </a:r>
+            <a:br/>
+            <a:r>
+              <a:t>Rapidly flags high vocal tract constriction and explosive loudness in customer billing dispute audio.</a:t>
+            </a:r>
+            <a:br/>
+            <a:br/>
+            <a:r>
+              <a:t>• Circumplex Positioning:</a:t>
+            </a:r>
+            <a:br/>
+            <a:r>
+              <a:t>Quadrant II (Negative Valence: -0.82, High Arousal: +0.89), signaling high hostility.</a:t>
+            </a:r>
+            <a:br/>
+            <a:br/>
+            <a:r>
+              <a:t>• Extreme Acoustic Energy:</a:t>
+            </a:r>
+            <a:br/>
+            <a:r>
+              <a:t>RMS Energy rises to 0.84 dB with fundamental pitch spiking to 265 Hz.</a:t>
             </a:r>
           </a:p>
         </p:txBody>
